--- a/pptx-asset-library/decks/06_org/ORG_matrix_v2.pptx
+++ b/pptx-asset-library/decks/06_org/ORG_matrix_v2.pptx
@@ -3090,1445 +3090,1430 @@
         <p:nvPr/>
       </p:nvGrpSpPr>
       <p:grpSpPr/>
-      <p:grpSp>
-        <p:nvGrpSpPr>
-          <p:cNvPr id="6" name="asset:ORG-009"/>
-          <p:cNvGrpSpPr/>
+      <p:sp>
+        <p:nvSpPr>
+          <p:cNvPr id="2" name="TextBox 1"/>
+          <p:cNvSpPr txBox="1"/>
           <p:nvPr/>
-        </p:nvGrpSpPr>
-        <p:grpSpPr>
+        </p:nvSpPr>
+        <p:spPr>
           <a:xfrm>
             <a:off x="137160" y="73152"/>
-            <a:ext cx="11521440" cy="5458968"/>
-            <a:chOff x="137160" y="73152"/>
-            <a:chExt cx="11521440" cy="5458968"/>
+            <a:ext cx="3657600" cy="274320"/>
           </a:xfrm>
-        </p:grpSpPr>
-        <p:sp>
-          <p:nvSpPr>
-            <p:cNvPr id="2" name="TextBox 1"/>
-            <p:cNvSpPr txBox="1"/>
-            <p:nvPr/>
-          </p:nvSpPr>
-          <p:spPr>
-            <a:xfrm>
-              <a:off x="137160" y="73152"/>
-              <a:ext cx="3657600" cy="274320"/>
-            </a:xfrm>
-            <a:prstGeom prst="rect">
-              <a:avLst/>
-            </a:prstGeom>
-            <a:noFill/>
-          </p:spPr>
-          <p:txBody>
-            <a:bodyPr wrap="square" anchor="ctr" lIns="38100" rIns="38100" tIns="25400" bIns="25400">
-              <a:spAutoFit/>
-            </a:bodyPr>
-            <a:lstStyle/>
-            <a:p>
-              <a:pPr algn="l"/>
-              <a:r>
-                <a:rPr sz="900" b="1">
-                  <a:solidFill>
-                    <a:srgbClr val="808080"/>
-                  </a:solidFill>
-                  <a:latin typeface="Pretendard"/>
-                  <a:ea typeface="Pretendard"/>
-                  <a:cs typeface="Pretendard"/>
-                </a:rPr>
-                <a:t>ORG-009 · RACI 책임 배분표</a:t>
-              </a:r>
-            </a:p>
-          </p:txBody>
-        </p:sp>
-        <p:sp>
-          <p:nvSpPr>
-            <p:cNvPr id="3" name="TextBox 2"/>
-            <p:cNvSpPr txBox="1"/>
-            <p:nvPr/>
-          </p:nvSpPr>
-          <p:spPr>
-            <a:xfrm>
-              <a:off x="502920" y="457200"/>
-              <a:ext cx="11155680" cy="457200"/>
-            </a:xfrm>
-            <a:prstGeom prst="rect">
-              <a:avLst/>
-            </a:prstGeom>
-            <a:noFill/>
-          </p:spPr>
-          <p:txBody>
-            <a:bodyPr wrap="square" anchor="ctr" lIns="38100" rIns="38100" tIns="25400" bIns="25400">
-              <a:spAutoFit/>
-            </a:bodyPr>
-            <a:lstStyle/>
-            <a:p>
-              <a:pPr algn="l"/>
-              <a:r>
-                <a:rPr sz="1800" b="1">
-                  <a:solidFill>
-                    <a:srgbClr val="1F3864"/>
-                  </a:solidFill>
-                  <a:latin typeface="Pretendard"/>
-                  <a:ea typeface="Pretendard"/>
-                  <a:cs typeface="Pretendard"/>
-                </a:rPr>
-                <a:t>RACI 책임 배분 매트릭스</a:t>
-              </a:r>
-            </a:p>
-          </p:txBody>
-        </p:sp>
-        <p:sp>
-          <p:nvSpPr>
-            <p:cNvPr id="4" name="TextBox 3"/>
-            <p:cNvSpPr txBox="1"/>
-            <p:nvPr/>
-          </p:nvSpPr>
-          <p:spPr>
-            <a:xfrm>
-              <a:off x="502920" y="914400"/>
-              <a:ext cx="11155680" cy="292608"/>
-            </a:xfrm>
-            <a:prstGeom prst="rect">
-              <a:avLst/>
-            </a:prstGeom>
-            <a:noFill/>
-          </p:spPr>
-          <p:txBody>
-            <a:bodyPr wrap="square" anchor="ctr" lIns="38100" rIns="38100" tIns="25400" bIns="25400">
-              <a:spAutoFit/>
-            </a:bodyPr>
-            <a:lstStyle/>
-            <a:p>
-              <a:pPr algn="l"/>
-              <a:r>
-                <a:rPr sz="1100" b="0">
-                  <a:solidFill>
-                    <a:srgbClr val="595959"/>
-                  </a:solidFill>
-                  <a:latin typeface="Pretendard"/>
-                  <a:ea typeface="Pretendard"/>
-                  <a:cs typeface="Pretendard"/>
-                </a:rPr>
-                <a:t>핵심 업무별 역할 책임(R/A/C/I) 정의 — 제안 수행조직</a:t>
-              </a:r>
-            </a:p>
-          </p:txBody>
-        </p:sp>
-        <p:graphicFrame>
-          <p:nvGraphicFramePr>
-            <p:cNvPr id="5" name="ORG-009_bg"/>
-            <p:cNvGraphicFramePr>
-              <a:graphicFrameLocks noGrp="1"/>
-            </p:cNvGraphicFramePr>
-            <p:nvPr/>
-          </p:nvGraphicFramePr>
-          <p:xfrm>
-            <a:off x="640080" y="1417320"/>
-            <a:ext cx="10835640" cy="4114800"/>
-          </p:xfrm>
-          <a:graphic>
-            <a:graphicData uri="http://schemas.openxmlformats.org/drawingml/2006/table">
-              <a:tbl>
-                <a:tblPr>
-                  <a:tableStyleId>{5C22544A-7EE6-4342-B048-85BDC9FD1C3A}</a:tableStyleId>
-                </a:tblPr>
-                <a:tblGrid>
-                  <a:gridCol w="2377440"/>
-                  <a:gridCol w="1691640"/>
-                  <a:gridCol w="1691640"/>
-                  <a:gridCol w="1691640"/>
-                  <a:gridCol w="1691640"/>
-                  <a:gridCol w="1691640"/>
-                </a:tblGrid>
-                <a:tr h="457200">
-                  <a:tc>
-                    <a:txBody>
-                      <a:bodyPr wrap="square"/>
-                      <a:lstStyle/>
-                      <a:p>
-                        <a:pPr algn="l"/>
-                        <a:r>
-                          <a:rPr sz="1200" b="1">
-                            <a:solidFill>
-                              <a:srgbClr val="FFFFFF"/>
-                            </a:solidFill>
-                            <a:latin typeface="Pretendard"/>
-                            <a:ea typeface="Pretendard"/>
-                            <a:cs typeface="Pretendard"/>
-                          </a:rPr>
-                          <a:t>핵심 업무</a:t>
-                        </a:r>
-                      </a:p>
-                    </a:txBody>
-                    <a:tcPr anchor="ctr" marL="63500" marR="63500" marT="38100" marB="38100">
-                      <a:solidFill>
-                        <a:srgbClr val="1F3864"/>
-                      </a:solidFill>
-                    </a:tcPr>
-                  </a:tc>
-                  <a:tc>
-                    <a:txBody>
-                      <a:bodyPr wrap="square"/>
-                      <a:lstStyle/>
-                      <a:p>
-                        <a:pPr algn="ctr"/>
-                        <a:r>
-                          <a:rPr sz="1200" b="1">
-                            <a:solidFill>
-                              <a:srgbClr val="FFFFFF"/>
-                            </a:solidFill>
-                            <a:latin typeface="Pretendard"/>
-                            <a:ea typeface="Pretendard"/>
-                            <a:cs typeface="Pretendard"/>
-                          </a:rPr>
-                          <a:t>총괄PM</a:t>
-                        </a:r>
-                      </a:p>
-                    </a:txBody>
-                    <a:tcPr anchor="ctr" marL="63500" marR="63500" marT="38100" marB="38100">
-                      <a:solidFill>
-                        <a:srgbClr val="1F3864"/>
-                      </a:solidFill>
-                    </a:tcPr>
-                  </a:tc>
-                  <a:tc>
-                    <a:txBody>
-                      <a:bodyPr wrap="square"/>
-                      <a:lstStyle/>
-                      <a:p>
-                        <a:pPr algn="ctr"/>
-                        <a:r>
-                          <a:rPr sz="1200" b="1">
-                            <a:solidFill>
-                              <a:srgbClr val="FFFFFF"/>
-                            </a:solidFill>
-                            <a:latin typeface="Pretendard"/>
-                            <a:ea typeface="Pretendard"/>
-                            <a:cs typeface="Pretendard"/>
-                          </a:rPr>
-                          <a:t>기획팀</a:t>
-                        </a:r>
-                      </a:p>
-                    </a:txBody>
-                    <a:tcPr anchor="ctr" marL="63500" marR="63500" marT="38100" marB="38100">
-                      <a:solidFill>
-                        <a:srgbClr val="1F3864"/>
-                      </a:solidFill>
-                    </a:tcPr>
-                  </a:tc>
-                  <a:tc>
-                    <a:txBody>
-                      <a:bodyPr wrap="square"/>
-                      <a:lstStyle/>
-                      <a:p>
-                        <a:pPr algn="ctr"/>
-                        <a:r>
-                          <a:rPr sz="1200" b="1">
-                            <a:solidFill>
-                              <a:srgbClr val="FFFFFF"/>
-                            </a:solidFill>
-                            <a:latin typeface="Pretendard"/>
-                            <a:ea typeface="Pretendard"/>
-                            <a:cs typeface="Pretendard"/>
-                          </a:rPr>
-                          <a:t>개발팀</a:t>
-                        </a:r>
-                      </a:p>
-                    </a:txBody>
-                    <a:tcPr anchor="ctr" marL="63500" marR="63500" marT="38100" marB="38100">
-                      <a:solidFill>
-                        <a:srgbClr val="1F3864"/>
-                      </a:solidFill>
-                    </a:tcPr>
-                  </a:tc>
-                  <a:tc>
-                    <a:txBody>
-                      <a:bodyPr wrap="square"/>
-                      <a:lstStyle/>
-                      <a:p>
-                        <a:pPr algn="ctr"/>
-                        <a:r>
-                          <a:rPr sz="1200" b="1">
-                            <a:solidFill>
-                              <a:srgbClr val="FFFFFF"/>
-                            </a:solidFill>
-                            <a:latin typeface="Pretendard"/>
-                            <a:ea typeface="Pretendard"/>
-                            <a:cs typeface="Pretendard"/>
-                          </a:rPr>
-                          <a:t>현지화팀</a:t>
-                        </a:r>
-                      </a:p>
-                    </a:txBody>
-                    <a:tcPr anchor="ctr" marL="63500" marR="63500" marT="38100" marB="38100">
-                      <a:solidFill>
-                        <a:srgbClr val="1F3864"/>
-                      </a:solidFill>
-                    </a:tcPr>
-                  </a:tc>
-                  <a:tc>
-                    <a:txBody>
-                      <a:bodyPr wrap="square"/>
-                      <a:lstStyle/>
-                      <a:p>
-                        <a:pPr algn="ctr"/>
-                        <a:r>
-                          <a:rPr sz="1200" b="1">
-                            <a:solidFill>
-                              <a:srgbClr val="FFFFFF"/>
-                            </a:solidFill>
-                            <a:latin typeface="Pretendard"/>
-                            <a:ea typeface="Pretendard"/>
-                            <a:cs typeface="Pretendard"/>
-                          </a:rPr>
-                          <a:t>품질(QA)</a:t>
-                        </a:r>
-                      </a:p>
-                    </a:txBody>
-                    <a:tcPr anchor="ctr" marL="63500" marR="63500" marT="38100" marB="38100">
-                      <a:solidFill>
-                        <a:srgbClr val="1F3864"/>
-                      </a:solidFill>
-                    </a:tcPr>
-                  </a:tc>
-                </a:tr>
-                <a:tr h="457200">
-                  <a:tc>
-                    <a:txBody>
-                      <a:bodyPr wrap="square"/>
-                      <a:lstStyle/>
-                      <a:p>
-                        <a:pPr algn="l"/>
-                        <a:r>
-                          <a:rPr sz="1100" b="1">
-                            <a:solidFill>
-                              <a:srgbClr val="222222"/>
-                            </a:solidFill>
-                            <a:latin typeface="Pretendard"/>
-                            <a:ea typeface="Pretendard"/>
-                            <a:cs typeface="Pretendard"/>
-                          </a:rPr>
-                          <a:t>사업 착수·킥오프</a:t>
-                        </a:r>
-                      </a:p>
-                    </a:txBody>
-                    <a:tcPr anchor="ctr" marL="63500" marR="63500" marT="38100" marB="38100">
-                      <a:solidFill>
-                        <a:srgbClr val="FFFFFF"/>
-                      </a:solidFill>
-                    </a:tcPr>
-                  </a:tc>
-                  <a:tc>
-                    <a:txBody>
-                      <a:bodyPr wrap="square"/>
-                      <a:lstStyle/>
-                      <a:p>
-                        <a:pPr algn="ctr"/>
-                        <a:r>
-                          <a:rPr sz="1300" b="1">
-                            <a:solidFill>
-                              <a:srgbClr val="C0392B"/>
-                            </a:solidFill>
-                            <a:latin typeface="Pretendard"/>
-                            <a:ea typeface="Pretendard"/>
-                            <a:cs typeface="Pretendard"/>
-                          </a:rPr>
-                          <a:t>A</a:t>
-                        </a:r>
-                      </a:p>
-                    </a:txBody>
-                    <a:tcPr anchor="ctr" marL="63500" marR="63500" marT="38100" marB="38100">
-                      <a:solidFill>
-                        <a:srgbClr val="FFFFFF"/>
-                      </a:solidFill>
-                    </a:tcPr>
-                  </a:tc>
-                  <a:tc>
-                    <a:txBody>
-                      <a:bodyPr wrap="square"/>
-                      <a:lstStyle/>
-                      <a:p>
-                        <a:pPr algn="ctr"/>
-                        <a:r>
-                          <a:rPr sz="1300" b="1">
-                            <a:solidFill>
-                              <a:srgbClr val="2E75D6"/>
-                            </a:solidFill>
-                            <a:latin typeface="Pretendard"/>
-                            <a:ea typeface="Pretendard"/>
-                            <a:cs typeface="Pretendard"/>
-                          </a:rPr>
-                          <a:t>R</a:t>
-                        </a:r>
-                      </a:p>
-                    </a:txBody>
-                    <a:tcPr anchor="ctr" marL="63500" marR="63500" marT="38100" marB="38100">
-                      <a:solidFill>
-                        <a:srgbClr val="FFFFFF"/>
-                      </a:solidFill>
-                    </a:tcPr>
-                  </a:tc>
-                  <a:tc>
-                    <a:txBody>
-                      <a:bodyPr wrap="square"/>
-                      <a:lstStyle/>
-                      <a:p>
-                        <a:pPr algn="ctr"/>
-                        <a:r>
-                          <a:rPr sz="1300" b="0">
-                            <a:solidFill>
-                              <a:srgbClr val="1F9E8F"/>
-                            </a:solidFill>
-                            <a:latin typeface="Pretendard"/>
-                            <a:ea typeface="Pretendard"/>
-                            <a:cs typeface="Pretendard"/>
-                          </a:rPr>
-                          <a:t>C</a:t>
-                        </a:r>
-                      </a:p>
-                    </a:txBody>
-                    <a:tcPr anchor="ctr" marL="63500" marR="63500" marT="38100" marB="38100">
-                      <a:solidFill>
-                        <a:srgbClr val="FFFFFF"/>
-                      </a:solidFill>
-                    </a:tcPr>
-                  </a:tc>
-                  <a:tc>
-                    <a:txBody>
-                      <a:bodyPr wrap="square"/>
-                      <a:lstStyle/>
-                      <a:p>
-                        <a:pPr algn="ctr"/>
-                        <a:r>
-                          <a:rPr sz="1300" b="0">
-                            <a:solidFill>
-                              <a:srgbClr val="595959"/>
-                            </a:solidFill>
-                            <a:latin typeface="Pretendard"/>
-                            <a:ea typeface="Pretendard"/>
-                            <a:cs typeface="Pretendard"/>
-                          </a:rPr>
-                          <a:t>I</a:t>
-                        </a:r>
-                      </a:p>
-                    </a:txBody>
-                    <a:tcPr anchor="ctr" marL="63500" marR="63500" marT="38100" marB="38100">
-                      <a:solidFill>
-                        <a:srgbClr val="FFFFFF"/>
-                      </a:solidFill>
-                    </a:tcPr>
-                  </a:tc>
-                  <a:tc>
-                    <a:txBody>
-                      <a:bodyPr wrap="square"/>
-                      <a:lstStyle/>
-                      <a:p>
-                        <a:pPr algn="ctr"/>
-                        <a:r>
-                          <a:rPr sz="1300" b="0">
-                            <a:solidFill>
-                              <a:srgbClr val="595959"/>
-                            </a:solidFill>
-                            <a:latin typeface="Pretendard"/>
-                            <a:ea typeface="Pretendard"/>
-                            <a:cs typeface="Pretendard"/>
-                          </a:rPr>
-                          <a:t>I</a:t>
-                        </a:r>
-                      </a:p>
-                    </a:txBody>
-                    <a:tcPr anchor="ctr" marL="63500" marR="63500" marT="38100" marB="38100">
-                      <a:solidFill>
-                        <a:srgbClr val="FFFFFF"/>
-                      </a:solidFill>
-                    </a:tcPr>
-                  </a:tc>
-                </a:tr>
-                <a:tr h="457200">
-                  <a:tc>
-                    <a:txBody>
-                      <a:bodyPr wrap="square"/>
-                      <a:lstStyle/>
-                      <a:p>
-                        <a:pPr algn="l"/>
-                        <a:r>
-                          <a:rPr sz="1100" b="1">
-                            <a:solidFill>
-                              <a:srgbClr val="222222"/>
-                            </a:solidFill>
-                            <a:latin typeface="Pretendard"/>
-                            <a:ea typeface="Pretendard"/>
-                            <a:cs typeface="Pretendard"/>
-                          </a:rPr>
-                          <a:t>요구사항 정의</a:t>
-                        </a:r>
-                      </a:p>
-                    </a:txBody>
-                    <a:tcPr anchor="ctr" marL="63500" marR="63500" marT="38100" marB="38100">
-                      <a:solidFill>
-                        <a:srgbClr val="F2F2F2"/>
-                      </a:solidFill>
-                    </a:tcPr>
-                  </a:tc>
-                  <a:tc>
-                    <a:txBody>
-                      <a:bodyPr wrap="square"/>
-                      <a:lstStyle/>
-                      <a:p>
-                        <a:pPr algn="ctr"/>
-                        <a:r>
-                          <a:rPr sz="1300" b="1">
-                            <a:solidFill>
-                              <a:srgbClr val="C0392B"/>
-                            </a:solidFill>
-                            <a:latin typeface="Pretendard"/>
-                            <a:ea typeface="Pretendard"/>
-                            <a:cs typeface="Pretendard"/>
-                          </a:rPr>
-                          <a:t>A</a:t>
-                        </a:r>
-                      </a:p>
-                    </a:txBody>
-                    <a:tcPr anchor="ctr" marL="63500" marR="63500" marT="38100" marB="38100">
-                      <a:solidFill>
-                        <a:srgbClr val="F2F2F2"/>
-                      </a:solidFill>
-                    </a:tcPr>
-                  </a:tc>
-                  <a:tc>
-                    <a:txBody>
-                      <a:bodyPr wrap="square"/>
-                      <a:lstStyle/>
-                      <a:p>
-                        <a:pPr algn="ctr"/>
-                        <a:r>
-                          <a:rPr sz="1300" b="1">
-                            <a:solidFill>
-                              <a:srgbClr val="2E75D6"/>
-                            </a:solidFill>
-                            <a:latin typeface="Pretendard"/>
-                            <a:ea typeface="Pretendard"/>
-                            <a:cs typeface="Pretendard"/>
-                          </a:rPr>
-                          <a:t>R</a:t>
-                        </a:r>
-                      </a:p>
-                    </a:txBody>
-                    <a:tcPr anchor="ctr" marL="63500" marR="63500" marT="38100" marB="38100">
-                      <a:solidFill>
-                        <a:srgbClr val="F2F2F2"/>
-                      </a:solidFill>
-                    </a:tcPr>
-                  </a:tc>
-                  <a:tc>
-                    <a:txBody>
-                      <a:bodyPr wrap="square"/>
-                      <a:lstStyle/>
-                      <a:p>
-                        <a:pPr algn="ctr"/>
-                        <a:r>
-                          <a:rPr sz="1300" b="0">
-                            <a:solidFill>
-                              <a:srgbClr val="1F9E8F"/>
-                            </a:solidFill>
-                            <a:latin typeface="Pretendard"/>
-                            <a:ea typeface="Pretendard"/>
-                            <a:cs typeface="Pretendard"/>
-                          </a:rPr>
-                          <a:t>C</a:t>
-                        </a:r>
-                      </a:p>
-                    </a:txBody>
-                    <a:tcPr anchor="ctr" marL="63500" marR="63500" marT="38100" marB="38100">
-                      <a:solidFill>
-                        <a:srgbClr val="F2F2F2"/>
-                      </a:solidFill>
-                    </a:tcPr>
-                  </a:tc>
-                  <a:tc>
-                    <a:txBody>
-                      <a:bodyPr wrap="square"/>
-                      <a:lstStyle/>
-                      <a:p>
-                        <a:pPr algn="ctr"/>
-                        <a:r>
-                          <a:rPr sz="1300" b="0">
-                            <a:solidFill>
-                              <a:srgbClr val="1F9E8F"/>
-                            </a:solidFill>
-                            <a:latin typeface="Pretendard"/>
-                            <a:ea typeface="Pretendard"/>
-                            <a:cs typeface="Pretendard"/>
-                          </a:rPr>
-                          <a:t>C</a:t>
-                        </a:r>
-                      </a:p>
-                    </a:txBody>
-                    <a:tcPr anchor="ctr" marL="63500" marR="63500" marT="38100" marB="38100">
-                      <a:solidFill>
-                        <a:srgbClr val="F2F2F2"/>
-                      </a:solidFill>
-                    </a:tcPr>
-                  </a:tc>
-                  <a:tc>
-                    <a:txBody>
-                      <a:bodyPr wrap="square"/>
-                      <a:lstStyle/>
-                      <a:p>
-                        <a:pPr algn="ctr"/>
-                        <a:r>
-                          <a:rPr sz="1300" b="0">
-                            <a:solidFill>
-                              <a:srgbClr val="595959"/>
-                            </a:solidFill>
-                            <a:latin typeface="Pretendard"/>
-                            <a:ea typeface="Pretendard"/>
-                            <a:cs typeface="Pretendard"/>
-                          </a:rPr>
-                          <a:t>I</a:t>
-                        </a:r>
-                      </a:p>
-                    </a:txBody>
-                    <a:tcPr anchor="ctr" marL="63500" marR="63500" marT="38100" marB="38100">
-                      <a:solidFill>
-                        <a:srgbClr val="F2F2F2"/>
-                      </a:solidFill>
-                    </a:tcPr>
-                  </a:tc>
-                </a:tr>
-                <a:tr h="457200">
-                  <a:tc>
-                    <a:txBody>
-                      <a:bodyPr wrap="square"/>
-                      <a:lstStyle/>
-                      <a:p>
-                        <a:pPr algn="l"/>
-                        <a:r>
-                          <a:rPr sz="1100" b="1">
-                            <a:solidFill>
-                              <a:srgbClr val="222222"/>
-                            </a:solidFill>
-                            <a:latin typeface="Pretendard"/>
-                            <a:ea typeface="Pretendard"/>
-                            <a:cs typeface="Pretendard"/>
-                          </a:rPr>
-                          <a:t>플랫폼 설계·개발</a:t>
-                        </a:r>
-                      </a:p>
-                    </a:txBody>
-                    <a:tcPr anchor="ctr" marL="63500" marR="63500" marT="38100" marB="38100">
-                      <a:solidFill>
-                        <a:srgbClr val="FFFFFF"/>
-                      </a:solidFill>
-                    </a:tcPr>
-                  </a:tc>
-                  <a:tc>
-                    <a:txBody>
-                      <a:bodyPr wrap="square"/>
-                      <a:lstStyle/>
-                      <a:p>
-                        <a:pPr algn="ctr"/>
-                        <a:r>
-                          <a:rPr sz="1300" b="1">
-                            <a:solidFill>
-                              <a:srgbClr val="C0392B"/>
-                            </a:solidFill>
-                            <a:latin typeface="Pretendard"/>
-                            <a:ea typeface="Pretendard"/>
-                            <a:cs typeface="Pretendard"/>
-                          </a:rPr>
-                          <a:t>A</a:t>
-                        </a:r>
-                      </a:p>
-                    </a:txBody>
-                    <a:tcPr anchor="ctr" marL="63500" marR="63500" marT="38100" marB="38100">
-                      <a:solidFill>
-                        <a:srgbClr val="FFFFFF"/>
-                      </a:solidFill>
-                    </a:tcPr>
-                  </a:tc>
-                  <a:tc>
-                    <a:txBody>
-                      <a:bodyPr wrap="square"/>
-                      <a:lstStyle/>
-                      <a:p>
-                        <a:pPr algn="ctr"/>
-                        <a:r>
-                          <a:rPr sz="1300" b="0">
-                            <a:solidFill>
-                              <a:srgbClr val="1F9E8F"/>
-                            </a:solidFill>
-                            <a:latin typeface="Pretendard"/>
-                            <a:ea typeface="Pretendard"/>
-                            <a:cs typeface="Pretendard"/>
-                          </a:rPr>
-                          <a:t>C</a:t>
-                        </a:r>
-                      </a:p>
-                    </a:txBody>
-                    <a:tcPr anchor="ctr" marL="63500" marR="63500" marT="38100" marB="38100">
-                      <a:solidFill>
-                        <a:srgbClr val="FFFFFF"/>
-                      </a:solidFill>
-                    </a:tcPr>
-                  </a:tc>
-                  <a:tc>
-                    <a:txBody>
-                      <a:bodyPr wrap="square"/>
-                      <a:lstStyle/>
-                      <a:p>
-                        <a:pPr algn="ctr"/>
-                        <a:r>
-                          <a:rPr sz="1300" b="1">
-                            <a:solidFill>
-                              <a:srgbClr val="2E75D6"/>
-                            </a:solidFill>
-                            <a:latin typeface="Pretendard"/>
-                            <a:ea typeface="Pretendard"/>
-                            <a:cs typeface="Pretendard"/>
-                          </a:rPr>
-                          <a:t>R</a:t>
-                        </a:r>
-                      </a:p>
-                    </a:txBody>
-                    <a:tcPr anchor="ctr" marL="63500" marR="63500" marT="38100" marB="38100">
-                      <a:solidFill>
-                        <a:srgbClr val="FFFFFF"/>
-                      </a:solidFill>
-                    </a:tcPr>
-                  </a:tc>
-                  <a:tc>
-                    <a:txBody>
-                      <a:bodyPr wrap="square"/>
-                      <a:lstStyle/>
-                      <a:p>
-                        <a:pPr algn="ctr"/>
-                        <a:r>
-                          <a:rPr sz="1300" b="0">
-                            <a:solidFill>
-                              <a:srgbClr val="595959"/>
-                            </a:solidFill>
-                            <a:latin typeface="Pretendard"/>
-                            <a:ea typeface="Pretendard"/>
-                            <a:cs typeface="Pretendard"/>
-                          </a:rPr>
-                          <a:t>I</a:t>
-                        </a:r>
-                      </a:p>
-                    </a:txBody>
-                    <a:tcPr anchor="ctr" marL="63500" marR="63500" marT="38100" marB="38100">
-                      <a:solidFill>
-                        <a:srgbClr val="FFFFFF"/>
-                      </a:solidFill>
-                    </a:tcPr>
-                  </a:tc>
-                  <a:tc>
-                    <a:txBody>
-                      <a:bodyPr wrap="square"/>
-                      <a:lstStyle/>
-                      <a:p>
-                        <a:pPr algn="ctr"/>
-                        <a:r>
-                          <a:rPr sz="1300" b="0">
-                            <a:solidFill>
-                              <a:srgbClr val="1F9E8F"/>
-                            </a:solidFill>
-                            <a:latin typeface="Pretendard"/>
-                            <a:ea typeface="Pretendard"/>
-                            <a:cs typeface="Pretendard"/>
-                          </a:rPr>
-                          <a:t>C</a:t>
-                        </a:r>
-                      </a:p>
-                    </a:txBody>
-                    <a:tcPr anchor="ctr" marL="63500" marR="63500" marT="38100" marB="38100">
-                      <a:solidFill>
-                        <a:srgbClr val="FFFFFF"/>
-                      </a:solidFill>
-                    </a:tcPr>
-                  </a:tc>
-                </a:tr>
-                <a:tr h="457200">
-                  <a:tc>
-                    <a:txBody>
-                      <a:bodyPr wrap="square"/>
-                      <a:lstStyle/>
-                      <a:p>
-                        <a:pPr algn="l"/>
-                        <a:r>
-                          <a:rPr sz="1100" b="1">
-                            <a:solidFill>
-                              <a:srgbClr val="222222"/>
-                            </a:solidFill>
-                            <a:latin typeface="Pretendard"/>
-                            <a:ea typeface="Pretendard"/>
-                            <a:cs typeface="Pretendard"/>
-                          </a:rPr>
-                          <a:t>콘텐츠 현지화</a:t>
-                        </a:r>
-                      </a:p>
-                    </a:txBody>
-                    <a:tcPr anchor="ctr" marL="63500" marR="63500" marT="38100" marB="38100">
-                      <a:solidFill>
-                        <a:srgbClr val="F2F2F2"/>
-                      </a:solidFill>
-                    </a:tcPr>
-                  </a:tc>
-                  <a:tc>
-                    <a:txBody>
-                      <a:bodyPr wrap="square"/>
-                      <a:lstStyle/>
-                      <a:p>
-                        <a:pPr algn="ctr"/>
-                        <a:r>
-                          <a:rPr sz="1300" b="1">
-                            <a:solidFill>
-                              <a:srgbClr val="C0392B"/>
-                            </a:solidFill>
-                            <a:latin typeface="Pretendard"/>
-                            <a:ea typeface="Pretendard"/>
-                            <a:cs typeface="Pretendard"/>
-                          </a:rPr>
-                          <a:t>A</a:t>
-                        </a:r>
-                      </a:p>
-                    </a:txBody>
-                    <a:tcPr anchor="ctr" marL="63500" marR="63500" marT="38100" marB="38100">
-                      <a:solidFill>
-                        <a:srgbClr val="F2F2F2"/>
-                      </a:solidFill>
-                    </a:tcPr>
-                  </a:tc>
-                  <a:tc>
-                    <a:txBody>
-                      <a:bodyPr wrap="square"/>
-                      <a:lstStyle/>
-                      <a:p>
-                        <a:pPr algn="ctr"/>
-                        <a:r>
-                          <a:rPr sz="1300" b="0">
-                            <a:solidFill>
-                              <a:srgbClr val="595959"/>
-                            </a:solidFill>
-                            <a:latin typeface="Pretendard"/>
-                            <a:ea typeface="Pretendard"/>
-                            <a:cs typeface="Pretendard"/>
-                          </a:rPr>
-                          <a:t>I</a:t>
-                        </a:r>
-                      </a:p>
-                    </a:txBody>
-                    <a:tcPr anchor="ctr" marL="63500" marR="63500" marT="38100" marB="38100">
-                      <a:solidFill>
-                        <a:srgbClr val="F2F2F2"/>
-                      </a:solidFill>
-                    </a:tcPr>
-                  </a:tc>
-                  <a:tc>
-                    <a:txBody>
-                      <a:bodyPr wrap="square"/>
-                      <a:lstStyle/>
-                      <a:p>
-                        <a:pPr algn="ctr"/>
-                        <a:r>
-                          <a:rPr sz="1300" b="0">
-                            <a:solidFill>
-                              <a:srgbClr val="1F9E8F"/>
-                            </a:solidFill>
-                            <a:latin typeface="Pretendard"/>
-                            <a:ea typeface="Pretendard"/>
-                            <a:cs typeface="Pretendard"/>
-                          </a:rPr>
-                          <a:t>C</a:t>
-                        </a:r>
-                      </a:p>
-                    </a:txBody>
-                    <a:tcPr anchor="ctr" marL="63500" marR="63500" marT="38100" marB="38100">
-                      <a:solidFill>
-                        <a:srgbClr val="F2F2F2"/>
-                      </a:solidFill>
-                    </a:tcPr>
-                  </a:tc>
-                  <a:tc>
-                    <a:txBody>
-                      <a:bodyPr wrap="square"/>
-                      <a:lstStyle/>
-                      <a:p>
-                        <a:pPr algn="ctr"/>
-                        <a:r>
-                          <a:rPr sz="1300" b="1">
-                            <a:solidFill>
-                              <a:srgbClr val="2E75D6"/>
-                            </a:solidFill>
-                            <a:latin typeface="Pretendard"/>
-                            <a:ea typeface="Pretendard"/>
-                            <a:cs typeface="Pretendard"/>
-                          </a:rPr>
-                          <a:t>R</a:t>
-                        </a:r>
-                      </a:p>
-                    </a:txBody>
-                    <a:tcPr anchor="ctr" marL="63500" marR="63500" marT="38100" marB="38100">
-                      <a:solidFill>
-                        <a:srgbClr val="F2F2F2"/>
-                      </a:solidFill>
-                    </a:tcPr>
-                  </a:tc>
-                  <a:tc>
-                    <a:txBody>
-                      <a:bodyPr wrap="square"/>
-                      <a:lstStyle/>
-                      <a:p>
-                        <a:pPr algn="ctr"/>
-                        <a:r>
-                          <a:rPr sz="1300" b="0">
-                            <a:solidFill>
-                              <a:srgbClr val="1F9E8F"/>
-                            </a:solidFill>
-                            <a:latin typeface="Pretendard"/>
-                            <a:ea typeface="Pretendard"/>
-                            <a:cs typeface="Pretendard"/>
-                          </a:rPr>
-                          <a:t>C</a:t>
-                        </a:r>
-                      </a:p>
-                    </a:txBody>
-                    <a:tcPr anchor="ctr" marL="63500" marR="63500" marT="38100" marB="38100">
-                      <a:solidFill>
-                        <a:srgbClr val="F2F2F2"/>
-                      </a:solidFill>
-                    </a:tcPr>
-                  </a:tc>
-                </a:tr>
-                <a:tr h="457200">
-                  <a:tc>
-                    <a:txBody>
-                      <a:bodyPr wrap="square"/>
-                      <a:lstStyle/>
-                      <a:p>
-                        <a:pPr algn="l"/>
-                        <a:r>
-                          <a:rPr sz="1100" b="1">
-                            <a:solidFill>
-                              <a:srgbClr val="222222"/>
-                            </a:solidFill>
-                            <a:latin typeface="Pretendard"/>
-                            <a:ea typeface="Pretendard"/>
-                            <a:cs typeface="Pretendard"/>
-                          </a:rPr>
-                          <a:t>통합 QA 테스트</a:t>
-                        </a:r>
-                      </a:p>
-                    </a:txBody>
-                    <a:tcPr anchor="ctr" marL="63500" marR="63500" marT="38100" marB="38100">
-                      <a:solidFill>
-                        <a:srgbClr val="FFFFFF"/>
-                      </a:solidFill>
-                    </a:tcPr>
-                  </a:tc>
-                  <a:tc>
-                    <a:txBody>
-                      <a:bodyPr wrap="square"/>
-                      <a:lstStyle/>
-                      <a:p>
-                        <a:pPr algn="ctr"/>
-                        <a:r>
-                          <a:rPr sz="1300" b="1">
-                            <a:solidFill>
-                              <a:srgbClr val="C0392B"/>
-                            </a:solidFill>
-                            <a:latin typeface="Pretendard"/>
-                            <a:ea typeface="Pretendard"/>
-                            <a:cs typeface="Pretendard"/>
-                          </a:rPr>
-                          <a:t>A</a:t>
-                        </a:r>
-                      </a:p>
-                    </a:txBody>
-                    <a:tcPr anchor="ctr" marL="63500" marR="63500" marT="38100" marB="38100">
-                      <a:solidFill>
-                        <a:srgbClr val="FFFFFF"/>
-                      </a:solidFill>
-                    </a:tcPr>
-                  </a:tc>
-                  <a:tc>
-                    <a:txBody>
-                      <a:bodyPr wrap="square"/>
-                      <a:lstStyle/>
-                      <a:p>
-                        <a:pPr algn="ctr"/>
-                        <a:r>
-                          <a:rPr sz="1300" b="0">
-                            <a:solidFill>
-                              <a:srgbClr val="595959"/>
-                            </a:solidFill>
-                            <a:latin typeface="Pretendard"/>
-                            <a:ea typeface="Pretendard"/>
-                            <a:cs typeface="Pretendard"/>
-                          </a:rPr>
-                          <a:t>I</a:t>
-                        </a:r>
-                      </a:p>
-                    </a:txBody>
-                    <a:tcPr anchor="ctr" marL="63500" marR="63500" marT="38100" marB="38100">
-                      <a:solidFill>
-                        <a:srgbClr val="FFFFFF"/>
-                      </a:solidFill>
-                    </a:tcPr>
-                  </a:tc>
-                  <a:tc>
-                    <a:txBody>
-                      <a:bodyPr wrap="square"/>
-                      <a:lstStyle/>
-                      <a:p>
-                        <a:pPr algn="ctr"/>
-                        <a:r>
-                          <a:rPr sz="1300" b="0">
-                            <a:solidFill>
-                              <a:srgbClr val="1F9E8F"/>
-                            </a:solidFill>
-                            <a:latin typeface="Pretendard"/>
-                            <a:ea typeface="Pretendard"/>
-                            <a:cs typeface="Pretendard"/>
-                          </a:rPr>
-                          <a:t>C</a:t>
-                        </a:r>
-                      </a:p>
-                    </a:txBody>
-                    <a:tcPr anchor="ctr" marL="63500" marR="63500" marT="38100" marB="38100">
-                      <a:solidFill>
-                        <a:srgbClr val="FFFFFF"/>
-                      </a:solidFill>
-                    </a:tcPr>
-                  </a:tc>
-                  <a:tc>
-                    <a:txBody>
-                      <a:bodyPr wrap="square"/>
-                      <a:lstStyle/>
-                      <a:p>
-                        <a:pPr algn="ctr"/>
-                        <a:r>
-                          <a:rPr sz="1300" b="0">
-                            <a:solidFill>
-                              <a:srgbClr val="1F9E8F"/>
-                            </a:solidFill>
-                            <a:latin typeface="Pretendard"/>
-                            <a:ea typeface="Pretendard"/>
-                            <a:cs typeface="Pretendard"/>
-                          </a:rPr>
-                          <a:t>C</a:t>
-                        </a:r>
-                      </a:p>
-                    </a:txBody>
-                    <a:tcPr anchor="ctr" marL="63500" marR="63500" marT="38100" marB="38100">
-                      <a:solidFill>
-                        <a:srgbClr val="FFFFFF"/>
-                      </a:solidFill>
-                    </a:tcPr>
-                  </a:tc>
-                  <a:tc>
-                    <a:txBody>
-                      <a:bodyPr wrap="square"/>
-                      <a:lstStyle/>
-                      <a:p>
-                        <a:pPr algn="ctr"/>
-                        <a:r>
-                          <a:rPr sz="1300" b="1">
-                            <a:solidFill>
-                              <a:srgbClr val="2E75D6"/>
-                            </a:solidFill>
-                            <a:latin typeface="Pretendard"/>
-                            <a:ea typeface="Pretendard"/>
-                            <a:cs typeface="Pretendard"/>
-                          </a:rPr>
-                          <a:t>R</a:t>
-                        </a:r>
-                      </a:p>
-                    </a:txBody>
-                    <a:tcPr anchor="ctr" marL="63500" marR="63500" marT="38100" marB="38100">
-                      <a:solidFill>
-                        <a:srgbClr val="FFFFFF"/>
-                      </a:solidFill>
-                    </a:tcPr>
-                  </a:tc>
-                </a:tr>
-                <a:tr h="457200">
-                  <a:tc>
-                    <a:txBody>
-                      <a:bodyPr wrap="square"/>
-                      <a:lstStyle/>
-                      <a:p>
-                        <a:pPr algn="l"/>
-                        <a:r>
-                          <a:rPr sz="1100" b="1">
-                            <a:solidFill>
-                              <a:srgbClr val="222222"/>
-                            </a:solidFill>
-                            <a:latin typeface="Pretendard"/>
-                            <a:ea typeface="Pretendard"/>
-                            <a:cs typeface="Pretendard"/>
-                          </a:rPr>
-                          <a:t>발주처 보고·검수</a:t>
-                        </a:r>
-                      </a:p>
-                    </a:txBody>
-                    <a:tcPr anchor="ctr" marL="63500" marR="63500" marT="38100" marB="38100">
-                      <a:solidFill>
-                        <a:srgbClr val="F2F2F2"/>
-                      </a:solidFill>
-                    </a:tcPr>
-                  </a:tc>
-                  <a:tc>
-                    <a:txBody>
-                      <a:bodyPr wrap="square"/>
-                      <a:lstStyle/>
-                      <a:p>
-                        <a:pPr algn="ctr"/>
-                        <a:r>
-                          <a:rPr sz="1300" b="1">
-                            <a:solidFill>
-                              <a:srgbClr val="C0392B"/>
-                            </a:solidFill>
-                            <a:latin typeface="Pretendard"/>
-                            <a:ea typeface="Pretendard"/>
-                            <a:cs typeface="Pretendard"/>
-                          </a:rPr>
-                          <a:t>A</a:t>
-                        </a:r>
-                      </a:p>
-                    </a:txBody>
-                    <a:tcPr anchor="ctr" marL="63500" marR="63500" marT="38100" marB="38100">
-                      <a:solidFill>
-                        <a:srgbClr val="F2F2F2"/>
-                      </a:solidFill>
-                    </a:tcPr>
-                  </a:tc>
-                  <a:tc>
-                    <a:txBody>
-                      <a:bodyPr wrap="square"/>
-                      <a:lstStyle/>
-                      <a:p>
-                        <a:pPr algn="ctr"/>
-                        <a:r>
-                          <a:rPr sz="1300" b="1">
-                            <a:solidFill>
-                              <a:srgbClr val="2E75D6"/>
-                            </a:solidFill>
-                            <a:latin typeface="Pretendard"/>
-                            <a:ea typeface="Pretendard"/>
-                            <a:cs typeface="Pretendard"/>
-                          </a:rPr>
-                          <a:t>R</a:t>
-                        </a:r>
-                      </a:p>
-                    </a:txBody>
-                    <a:tcPr anchor="ctr" marL="63500" marR="63500" marT="38100" marB="38100">
-                      <a:solidFill>
-                        <a:srgbClr val="F2F2F2"/>
-                      </a:solidFill>
-                    </a:tcPr>
-                  </a:tc>
-                  <a:tc>
-                    <a:txBody>
-                      <a:bodyPr wrap="square"/>
-                      <a:lstStyle/>
-                      <a:p>
-                        <a:pPr algn="ctr"/>
-                        <a:r>
-                          <a:rPr sz="1300" b="0">
-                            <a:solidFill>
-                              <a:srgbClr val="595959"/>
-                            </a:solidFill>
-                            <a:latin typeface="Pretendard"/>
-                            <a:ea typeface="Pretendard"/>
-                            <a:cs typeface="Pretendard"/>
-                          </a:rPr>
-                          <a:t>I</a:t>
-                        </a:r>
-                      </a:p>
-                    </a:txBody>
-                    <a:tcPr anchor="ctr" marL="63500" marR="63500" marT="38100" marB="38100">
-                      <a:solidFill>
-                        <a:srgbClr val="F2F2F2"/>
-                      </a:solidFill>
-                    </a:tcPr>
-                  </a:tc>
-                  <a:tc>
-                    <a:txBody>
-                      <a:bodyPr wrap="square"/>
-                      <a:lstStyle/>
-                      <a:p>
-                        <a:pPr algn="ctr"/>
-                        <a:r>
-                          <a:rPr sz="1300" b="0">
-                            <a:solidFill>
-                              <a:srgbClr val="595959"/>
-                            </a:solidFill>
-                            <a:latin typeface="Pretendard"/>
-                            <a:ea typeface="Pretendard"/>
-                            <a:cs typeface="Pretendard"/>
-                          </a:rPr>
-                          <a:t>I</a:t>
-                        </a:r>
-                      </a:p>
-                    </a:txBody>
-                    <a:tcPr anchor="ctr" marL="63500" marR="63500" marT="38100" marB="38100">
-                      <a:solidFill>
-                        <a:srgbClr val="F2F2F2"/>
-                      </a:solidFill>
-                    </a:tcPr>
-                  </a:tc>
-                  <a:tc>
-                    <a:txBody>
-                      <a:bodyPr wrap="square"/>
-                      <a:lstStyle/>
-                      <a:p>
-                        <a:pPr algn="ctr"/>
-                        <a:r>
-                          <a:rPr sz="1300" b="0">
-                            <a:solidFill>
-                              <a:srgbClr val="595959"/>
-                            </a:solidFill>
-                            <a:latin typeface="Pretendard"/>
-                            <a:ea typeface="Pretendard"/>
-                            <a:cs typeface="Pretendard"/>
-                          </a:rPr>
-                          <a:t>I</a:t>
-                        </a:r>
-                      </a:p>
-                    </a:txBody>
-                    <a:tcPr anchor="ctr" marL="63500" marR="63500" marT="38100" marB="38100">
-                      <a:solidFill>
-                        <a:srgbClr val="F2F2F2"/>
-                      </a:solidFill>
-                    </a:tcPr>
-                  </a:tc>
-                </a:tr>
-                <a:tr h="457200">
-                  <a:tc>
-                    <a:txBody>
-                      <a:bodyPr wrap="square"/>
-                      <a:lstStyle/>
-                      <a:p>
-                        <a:pPr algn="l"/>
-                        <a:r>
-                          <a:rPr sz="1100" b="1">
-                            <a:solidFill>
-                              <a:srgbClr val="222222"/>
-                            </a:solidFill>
-                            <a:latin typeface="Pretendard"/>
-                            <a:ea typeface="Pretendard"/>
-                            <a:cs typeface="Pretendard"/>
-                          </a:rPr>
-                          <a:t>안정화·운영 이관</a:t>
-                        </a:r>
-                      </a:p>
-                    </a:txBody>
-                    <a:tcPr anchor="ctr" marL="63500" marR="63500" marT="38100" marB="38100">
-                      <a:solidFill>
-                        <a:srgbClr val="FFFFFF"/>
-                      </a:solidFill>
-                    </a:tcPr>
-                  </a:tc>
-                  <a:tc>
-                    <a:txBody>
-                      <a:bodyPr wrap="square"/>
-                      <a:lstStyle/>
-                      <a:p>
-                        <a:pPr algn="ctr"/>
-                        <a:r>
-                          <a:rPr sz="1300" b="1">
-                            <a:solidFill>
-                              <a:srgbClr val="C0392B"/>
-                            </a:solidFill>
-                            <a:latin typeface="Pretendard"/>
-                            <a:ea typeface="Pretendard"/>
-                            <a:cs typeface="Pretendard"/>
-                          </a:rPr>
-                          <a:t>A</a:t>
-                        </a:r>
-                      </a:p>
-                    </a:txBody>
-                    <a:tcPr anchor="ctr" marL="63500" marR="63500" marT="38100" marB="38100">
-                      <a:solidFill>
-                        <a:srgbClr val="FFFFFF"/>
-                      </a:solidFill>
-                    </a:tcPr>
-                  </a:tc>
-                  <a:tc>
-                    <a:txBody>
-                      <a:bodyPr wrap="square"/>
-                      <a:lstStyle/>
-                      <a:p>
-                        <a:pPr algn="ctr"/>
-                        <a:r>
-                          <a:rPr sz="1300" b="0">
-                            <a:solidFill>
-                              <a:srgbClr val="595959"/>
-                            </a:solidFill>
-                            <a:latin typeface="Pretendard"/>
-                            <a:ea typeface="Pretendard"/>
-                            <a:cs typeface="Pretendard"/>
-                          </a:rPr>
-                          <a:t>I</a:t>
-                        </a:r>
-                      </a:p>
-                    </a:txBody>
-                    <a:tcPr anchor="ctr" marL="63500" marR="63500" marT="38100" marB="38100">
-                      <a:solidFill>
-                        <a:srgbClr val="FFFFFF"/>
-                      </a:solidFill>
-                    </a:tcPr>
-                  </a:tc>
-                  <a:tc>
-                    <a:txBody>
-                      <a:bodyPr wrap="square"/>
-                      <a:lstStyle/>
-                      <a:p>
-                        <a:pPr algn="ctr"/>
-                        <a:r>
-                          <a:rPr sz="1300" b="1">
-                            <a:solidFill>
-                              <a:srgbClr val="2E75D6"/>
-                            </a:solidFill>
-                            <a:latin typeface="Pretendard"/>
-                            <a:ea typeface="Pretendard"/>
-                            <a:cs typeface="Pretendard"/>
-                          </a:rPr>
-                          <a:t>R</a:t>
-                        </a:r>
-                      </a:p>
-                    </a:txBody>
-                    <a:tcPr anchor="ctr" marL="63500" marR="63500" marT="38100" marB="38100">
-                      <a:solidFill>
-                        <a:srgbClr val="FFFFFF"/>
-                      </a:solidFill>
-                    </a:tcPr>
-                  </a:tc>
-                  <a:tc>
-                    <a:txBody>
-                      <a:bodyPr wrap="square"/>
-                      <a:lstStyle/>
-                      <a:p>
-                        <a:pPr algn="ctr"/>
-                        <a:r>
-                          <a:rPr sz="1300" b="0">
-                            <a:solidFill>
-                              <a:srgbClr val="1F9E8F"/>
-                            </a:solidFill>
-                            <a:latin typeface="Pretendard"/>
-                            <a:ea typeface="Pretendard"/>
-                            <a:cs typeface="Pretendard"/>
-                          </a:rPr>
-                          <a:t>C</a:t>
-                        </a:r>
-                      </a:p>
-                    </a:txBody>
-                    <a:tcPr anchor="ctr" marL="63500" marR="63500" marT="38100" marB="38100">
-                      <a:solidFill>
-                        <a:srgbClr val="FFFFFF"/>
-                      </a:solidFill>
-                    </a:tcPr>
-                  </a:tc>
-                  <a:tc>
-                    <a:txBody>
-                      <a:bodyPr wrap="square"/>
-                      <a:lstStyle/>
-                      <a:p>
-                        <a:pPr algn="ctr"/>
-                        <a:r>
-                          <a:rPr sz="1300" b="1">
-                            <a:solidFill>
-                              <a:srgbClr val="2E75D6"/>
-                            </a:solidFill>
-                            <a:latin typeface="Pretendard"/>
-                            <a:ea typeface="Pretendard"/>
-                            <a:cs typeface="Pretendard"/>
-                          </a:rPr>
-                          <a:t>R</a:t>
-                        </a:r>
-                      </a:p>
-                    </a:txBody>
-                    <a:tcPr anchor="ctr" marL="63500" marR="63500" marT="38100" marB="38100">
-                      <a:solidFill>
-                        <a:srgbClr val="FFFFFF"/>
-                      </a:solidFill>
-                    </a:tcPr>
-                  </a:tc>
-                </a:tr>
-                <a:tr h="457200">
-                  <a:tc gridSpan="6">
-                    <a:txBody>
-                      <a:bodyPr wrap="square"/>
-                      <a:lstStyle/>
-                      <a:p>
-                        <a:pPr algn="ctr"/>
-                        <a:r>
-                          <a:rPr sz="1000" b="1">
-                            <a:solidFill>
-                              <a:srgbClr val="595959"/>
-                            </a:solidFill>
-                            <a:latin typeface="Pretendard"/>
-                            <a:ea typeface="Pretendard"/>
-                            <a:cs typeface="Pretendard"/>
-                          </a:rPr>
-                          <a:t>R 실무 담당(Responsible)   ·   A 최종 책임(Accountable)   ·   C 자문(Consulted)   ·   I 결과 공유(Informed)</a:t>
-                        </a:r>
-                      </a:p>
-                    </a:txBody>
-                    <a:tcPr anchor="ctr" marL="63500" marR="63500" marT="38100" marB="38100">
-                      <a:solidFill>
-                        <a:srgbClr val="F7F9FC"/>
-                      </a:solidFill>
-                    </a:tcPr>
-                  </a:tc>
-                  <a:tc hMerge="1">
-                    <a:txBody>
-                      <a:bodyPr/>
-                      <a:lstStyle/>
-                      <a:p/>
-                    </a:txBody>
-                    <a:tcPr/>
-                  </a:tc>
-                  <a:tc hMerge="1">
-                    <a:txBody>
-                      <a:bodyPr/>
-                      <a:lstStyle/>
-                      <a:p/>
-                    </a:txBody>
-                    <a:tcPr/>
-                  </a:tc>
-                  <a:tc hMerge="1">
-                    <a:txBody>
-                      <a:bodyPr/>
-                      <a:lstStyle/>
-                      <a:p/>
-                    </a:txBody>
-                    <a:tcPr/>
-                  </a:tc>
-                  <a:tc hMerge="1">
-                    <a:txBody>
-                      <a:bodyPr/>
-                      <a:lstStyle/>
-                      <a:p/>
-                    </a:txBody>
-                    <a:tcPr/>
-                  </a:tc>
-                  <a:tc hMerge="1">
-                    <a:txBody>
-                      <a:bodyPr/>
-                      <a:lstStyle/>
-                      <a:p/>
-                    </a:txBody>
-                    <a:tcPr/>
-                  </a:tc>
-                </a:tr>
-              </a:tbl>
-            </a:graphicData>
-          </a:graphic>
-        </p:graphicFrame>
-      </p:grpSp>
+          <a:prstGeom prst="rect">
+            <a:avLst/>
+          </a:prstGeom>
+          <a:noFill/>
+        </p:spPr>
+        <p:txBody>
+          <a:bodyPr wrap="square" anchor="ctr" lIns="38100" rIns="38100" tIns="25400" bIns="25400">
+            <a:spAutoFit/>
+          </a:bodyPr>
+          <a:lstStyle/>
+          <a:p>
+            <a:pPr algn="l"/>
+            <a:r>
+              <a:rPr sz="900" b="1">
+                <a:solidFill>
+                  <a:srgbClr val="808080"/>
+                </a:solidFill>
+                <a:latin typeface="Pretendard"/>
+                <a:ea typeface="Pretendard"/>
+                <a:cs typeface="Pretendard"/>
+              </a:rPr>
+              <a:t>ORG-009 · RACI 책임 배분표</a:t>
+            </a:r>
+          </a:p>
+        </p:txBody>
+      </p:sp>
+      <p:sp>
+        <p:nvSpPr>
+          <p:cNvPr id="3" name="TextBox 2"/>
+          <p:cNvSpPr txBox="1"/>
+          <p:nvPr/>
+        </p:nvSpPr>
+        <p:spPr>
+          <a:xfrm>
+            <a:off x="502920" y="457200"/>
+            <a:ext cx="11155680" cy="457200"/>
+          </a:xfrm>
+          <a:prstGeom prst="rect">
+            <a:avLst/>
+          </a:prstGeom>
+          <a:noFill/>
+        </p:spPr>
+        <p:txBody>
+          <a:bodyPr wrap="square" anchor="ctr" lIns="38100" rIns="38100" tIns="25400" bIns="25400">
+            <a:spAutoFit/>
+          </a:bodyPr>
+          <a:lstStyle/>
+          <a:p>
+            <a:pPr algn="l"/>
+            <a:r>
+              <a:rPr sz="1800" b="1">
+                <a:solidFill>
+                  <a:srgbClr val="1F3864"/>
+                </a:solidFill>
+                <a:latin typeface="Pretendard"/>
+                <a:ea typeface="Pretendard"/>
+                <a:cs typeface="Pretendard"/>
+              </a:rPr>
+              <a:t>RACI 책임 배분 매트릭스</a:t>
+            </a:r>
+          </a:p>
+        </p:txBody>
+      </p:sp>
+      <p:sp>
+        <p:nvSpPr>
+          <p:cNvPr id="4" name="TextBox 3"/>
+          <p:cNvSpPr txBox="1"/>
+          <p:nvPr/>
+        </p:nvSpPr>
+        <p:spPr>
+          <a:xfrm>
+            <a:off x="502920" y="914400"/>
+            <a:ext cx="11155680" cy="292608"/>
+          </a:xfrm>
+          <a:prstGeom prst="rect">
+            <a:avLst/>
+          </a:prstGeom>
+          <a:noFill/>
+        </p:spPr>
+        <p:txBody>
+          <a:bodyPr wrap="square" anchor="ctr" lIns="38100" rIns="38100" tIns="25400" bIns="25400">
+            <a:spAutoFit/>
+          </a:bodyPr>
+          <a:lstStyle/>
+          <a:p>
+            <a:pPr algn="l"/>
+            <a:r>
+              <a:rPr sz="1100" b="0">
+                <a:solidFill>
+                  <a:srgbClr val="595959"/>
+                </a:solidFill>
+                <a:latin typeface="Pretendard"/>
+                <a:ea typeface="Pretendard"/>
+                <a:cs typeface="Pretendard"/>
+              </a:rPr>
+              <a:t>핵심 업무별 역할 책임(R/A/C/I) 정의 — 제안 수행조직</a:t>
+            </a:r>
+          </a:p>
+        </p:txBody>
+      </p:sp>
+      <p:graphicFrame>
+        <p:nvGraphicFramePr>
+          <p:cNvPr id="5" name="asset:ORG-009"/>
+          <p:cNvGraphicFramePr>
+            <a:graphicFrameLocks noGrp="1"/>
+          </p:cNvGraphicFramePr>
+          <p:nvPr/>
+        </p:nvGraphicFramePr>
+        <p:xfrm>
+          <a:off x="640080" y="1417320"/>
+          <a:ext cx="10835640" cy="4114800"/>
+        </p:xfrm>
+        <a:graphic>
+          <a:graphicData uri="http://schemas.openxmlformats.org/drawingml/2006/table">
+            <a:tbl>
+              <a:tblPr>
+                <a:tableStyleId>{5C22544A-7EE6-4342-B048-85BDC9FD1C3A}</a:tableStyleId>
+              </a:tblPr>
+              <a:tblGrid>
+                <a:gridCol w="2377440"/>
+                <a:gridCol w="1691640"/>
+                <a:gridCol w="1691640"/>
+                <a:gridCol w="1691640"/>
+                <a:gridCol w="1691640"/>
+                <a:gridCol w="1691640"/>
+              </a:tblGrid>
+              <a:tr h="457200">
+                <a:tc>
+                  <a:txBody>
+                    <a:bodyPr wrap="square"/>
+                    <a:lstStyle/>
+                    <a:p>
+                      <a:pPr algn="l"/>
+                      <a:r>
+                        <a:rPr sz="1200" b="1">
+                          <a:solidFill>
+                            <a:srgbClr val="FFFFFF"/>
+                          </a:solidFill>
+                          <a:latin typeface="Pretendard"/>
+                          <a:ea typeface="Pretendard"/>
+                          <a:cs typeface="Pretendard"/>
+                        </a:rPr>
+                        <a:t>핵심 업무</a:t>
+                      </a:r>
+                    </a:p>
+                  </a:txBody>
+                  <a:tcPr anchor="ctr" marL="63500" marR="63500" marT="38100" marB="38100">
+                    <a:solidFill>
+                      <a:srgbClr val="1F3864"/>
+                    </a:solidFill>
+                  </a:tcPr>
+                </a:tc>
+                <a:tc>
+                  <a:txBody>
+                    <a:bodyPr wrap="square"/>
+                    <a:lstStyle/>
+                    <a:p>
+                      <a:pPr algn="ctr"/>
+                      <a:r>
+                        <a:rPr sz="1200" b="1">
+                          <a:solidFill>
+                            <a:srgbClr val="FFFFFF"/>
+                          </a:solidFill>
+                          <a:latin typeface="Pretendard"/>
+                          <a:ea typeface="Pretendard"/>
+                          <a:cs typeface="Pretendard"/>
+                        </a:rPr>
+                        <a:t>총괄PM</a:t>
+                      </a:r>
+                    </a:p>
+                  </a:txBody>
+                  <a:tcPr anchor="ctr" marL="63500" marR="63500" marT="38100" marB="38100">
+                    <a:solidFill>
+                      <a:srgbClr val="1F3864"/>
+                    </a:solidFill>
+                  </a:tcPr>
+                </a:tc>
+                <a:tc>
+                  <a:txBody>
+                    <a:bodyPr wrap="square"/>
+                    <a:lstStyle/>
+                    <a:p>
+                      <a:pPr algn="ctr"/>
+                      <a:r>
+                        <a:rPr sz="1200" b="1">
+                          <a:solidFill>
+                            <a:srgbClr val="FFFFFF"/>
+                          </a:solidFill>
+                          <a:latin typeface="Pretendard"/>
+                          <a:ea typeface="Pretendard"/>
+                          <a:cs typeface="Pretendard"/>
+                        </a:rPr>
+                        <a:t>기획팀</a:t>
+                      </a:r>
+                    </a:p>
+                  </a:txBody>
+                  <a:tcPr anchor="ctr" marL="63500" marR="63500" marT="38100" marB="38100">
+                    <a:solidFill>
+                      <a:srgbClr val="1F3864"/>
+                    </a:solidFill>
+                  </a:tcPr>
+                </a:tc>
+                <a:tc>
+                  <a:txBody>
+                    <a:bodyPr wrap="square"/>
+                    <a:lstStyle/>
+                    <a:p>
+                      <a:pPr algn="ctr"/>
+                      <a:r>
+                        <a:rPr sz="1200" b="1">
+                          <a:solidFill>
+                            <a:srgbClr val="FFFFFF"/>
+                          </a:solidFill>
+                          <a:latin typeface="Pretendard"/>
+                          <a:ea typeface="Pretendard"/>
+                          <a:cs typeface="Pretendard"/>
+                        </a:rPr>
+                        <a:t>개발팀</a:t>
+                      </a:r>
+                    </a:p>
+                  </a:txBody>
+                  <a:tcPr anchor="ctr" marL="63500" marR="63500" marT="38100" marB="38100">
+                    <a:solidFill>
+                      <a:srgbClr val="1F3864"/>
+                    </a:solidFill>
+                  </a:tcPr>
+                </a:tc>
+                <a:tc>
+                  <a:txBody>
+                    <a:bodyPr wrap="square"/>
+                    <a:lstStyle/>
+                    <a:p>
+                      <a:pPr algn="ctr"/>
+                      <a:r>
+                        <a:rPr sz="1200" b="1">
+                          <a:solidFill>
+                            <a:srgbClr val="FFFFFF"/>
+                          </a:solidFill>
+                          <a:latin typeface="Pretendard"/>
+                          <a:ea typeface="Pretendard"/>
+                          <a:cs typeface="Pretendard"/>
+                        </a:rPr>
+                        <a:t>현지화팀</a:t>
+                      </a:r>
+                    </a:p>
+                  </a:txBody>
+                  <a:tcPr anchor="ctr" marL="63500" marR="63500" marT="38100" marB="38100">
+                    <a:solidFill>
+                      <a:srgbClr val="1F3864"/>
+                    </a:solidFill>
+                  </a:tcPr>
+                </a:tc>
+                <a:tc>
+                  <a:txBody>
+                    <a:bodyPr wrap="square"/>
+                    <a:lstStyle/>
+                    <a:p>
+                      <a:pPr algn="ctr"/>
+                      <a:r>
+                        <a:rPr sz="1200" b="1">
+                          <a:solidFill>
+                            <a:srgbClr val="FFFFFF"/>
+                          </a:solidFill>
+                          <a:latin typeface="Pretendard"/>
+                          <a:ea typeface="Pretendard"/>
+                          <a:cs typeface="Pretendard"/>
+                        </a:rPr>
+                        <a:t>품질(QA)</a:t>
+                      </a:r>
+                    </a:p>
+                  </a:txBody>
+                  <a:tcPr anchor="ctr" marL="63500" marR="63500" marT="38100" marB="38100">
+                    <a:solidFill>
+                      <a:srgbClr val="1F3864"/>
+                    </a:solidFill>
+                  </a:tcPr>
+                </a:tc>
+              </a:tr>
+              <a:tr h="457200">
+                <a:tc>
+                  <a:txBody>
+                    <a:bodyPr wrap="square"/>
+                    <a:lstStyle/>
+                    <a:p>
+                      <a:pPr algn="l"/>
+                      <a:r>
+                        <a:rPr sz="1100" b="1">
+                          <a:solidFill>
+                            <a:srgbClr val="222222"/>
+                          </a:solidFill>
+                          <a:latin typeface="Pretendard"/>
+                          <a:ea typeface="Pretendard"/>
+                          <a:cs typeface="Pretendard"/>
+                        </a:rPr>
+                        <a:t>사업 착수·킥오프</a:t>
+                      </a:r>
+                    </a:p>
+                  </a:txBody>
+                  <a:tcPr anchor="ctr" marL="63500" marR="63500" marT="38100" marB="38100">
+                    <a:solidFill>
+                      <a:srgbClr val="FFFFFF"/>
+                    </a:solidFill>
+                  </a:tcPr>
+                </a:tc>
+                <a:tc>
+                  <a:txBody>
+                    <a:bodyPr wrap="square"/>
+                    <a:lstStyle/>
+                    <a:p>
+                      <a:pPr algn="ctr"/>
+                      <a:r>
+                        <a:rPr sz="1300" b="1">
+                          <a:solidFill>
+                            <a:srgbClr val="C0392B"/>
+                          </a:solidFill>
+                          <a:latin typeface="Pretendard"/>
+                          <a:ea typeface="Pretendard"/>
+                          <a:cs typeface="Pretendard"/>
+                        </a:rPr>
+                        <a:t>A</a:t>
+                      </a:r>
+                    </a:p>
+                  </a:txBody>
+                  <a:tcPr anchor="ctr" marL="63500" marR="63500" marT="38100" marB="38100">
+                    <a:solidFill>
+                      <a:srgbClr val="FFFFFF"/>
+                    </a:solidFill>
+                  </a:tcPr>
+                </a:tc>
+                <a:tc>
+                  <a:txBody>
+                    <a:bodyPr wrap="square"/>
+                    <a:lstStyle/>
+                    <a:p>
+                      <a:pPr algn="ctr"/>
+                      <a:r>
+                        <a:rPr sz="1300" b="1">
+                          <a:solidFill>
+                            <a:srgbClr val="2E75D6"/>
+                          </a:solidFill>
+                          <a:latin typeface="Pretendard"/>
+                          <a:ea typeface="Pretendard"/>
+                          <a:cs typeface="Pretendard"/>
+                        </a:rPr>
+                        <a:t>R</a:t>
+                      </a:r>
+                    </a:p>
+                  </a:txBody>
+                  <a:tcPr anchor="ctr" marL="63500" marR="63500" marT="38100" marB="38100">
+                    <a:solidFill>
+                      <a:srgbClr val="FFFFFF"/>
+                    </a:solidFill>
+                  </a:tcPr>
+                </a:tc>
+                <a:tc>
+                  <a:txBody>
+                    <a:bodyPr wrap="square"/>
+                    <a:lstStyle/>
+                    <a:p>
+                      <a:pPr algn="ctr"/>
+                      <a:r>
+                        <a:rPr sz="1300" b="0">
+                          <a:solidFill>
+                            <a:srgbClr val="1F9E8F"/>
+                          </a:solidFill>
+                          <a:latin typeface="Pretendard"/>
+                          <a:ea typeface="Pretendard"/>
+                          <a:cs typeface="Pretendard"/>
+                        </a:rPr>
+                        <a:t>C</a:t>
+                      </a:r>
+                    </a:p>
+                  </a:txBody>
+                  <a:tcPr anchor="ctr" marL="63500" marR="63500" marT="38100" marB="38100">
+                    <a:solidFill>
+                      <a:srgbClr val="FFFFFF"/>
+                    </a:solidFill>
+                  </a:tcPr>
+                </a:tc>
+                <a:tc>
+                  <a:txBody>
+                    <a:bodyPr wrap="square"/>
+                    <a:lstStyle/>
+                    <a:p>
+                      <a:pPr algn="ctr"/>
+                      <a:r>
+                        <a:rPr sz="1300" b="0">
+                          <a:solidFill>
+                            <a:srgbClr val="595959"/>
+                          </a:solidFill>
+                          <a:latin typeface="Pretendard"/>
+                          <a:ea typeface="Pretendard"/>
+                          <a:cs typeface="Pretendard"/>
+                        </a:rPr>
+                        <a:t>I</a:t>
+                      </a:r>
+                    </a:p>
+                  </a:txBody>
+                  <a:tcPr anchor="ctr" marL="63500" marR="63500" marT="38100" marB="38100">
+                    <a:solidFill>
+                      <a:srgbClr val="FFFFFF"/>
+                    </a:solidFill>
+                  </a:tcPr>
+                </a:tc>
+                <a:tc>
+                  <a:txBody>
+                    <a:bodyPr wrap="square"/>
+                    <a:lstStyle/>
+                    <a:p>
+                      <a:pPr algn="ctr"/>
+                      <a:r>
+                        <a:rPr sz="1300" b="0">
+                          <a:solidFill>
+                            <a:srgbClr val="595959"/>
+                          </a:solidFill>
+                          <a:latin typeface="Pretendard"/>
+                          <a:ea typeface="Pretendard"/>
+                          <a:cs typeface="Pretendard"/>
+                        </a:rPr>
+                        <a:t>I</a:t>
+                      </a:r>
+                    </a:p>
+                  </a:txBody>
+                  <a:tcPr anchor="ctr" marL="63500" marR="63500" marT="38100" marB="38100">
+                    <a:solidFill>
+                      <a:srgbClr val="FFFFFF"/>
+                    </a:solidFill>
+                  </a:tcPr>
+                </a:tc>
+              </a:tr>
+              <a:tr h="457200">
+                <a:tc>
+                  <a:txBody>
+                    <a:bodyPr wrap="square"/>
+                    <a:lstStyle/>
+                    <a:p>
+                      <a:pPr algn="l"/>
+                      <a:r>
+                        <a:rPr sz="1100" b="1">
+                          <a:solidFill>
+                            <a:srgbClr val="222222"/>
+                          </a:solidFill>
+                          <a:latin typeface="Pretendard"/>
+                          <a:ea typeface="Pretendard"/>
+                          <a:cs typeface="Pretendard"/>
+                        </a:rPr>
+                        <a:t>요구사항 정의</a:t>
+                      </a:r>
+                    </a:p>
+                  </a:txBody>
+                  <a:tcPr anchor="ctr" marL="63500" marR="63500" marT="38100" marB="38100">
+                    <a:solidFill>
+                      <a:srgbClr val="F2F2F2"/>
+                    </a:solidFill>
+                  </a:tcPr>
+                </a:tc>
+                <a:tc>
+                  <a:txBody>
+                    <a:bodyPr wrap="square"/>
+                    <a:lstStyle/>
+                    <a:p>
+                      <a:pPr algn="ctr"/>
+                      <a:r>
+                        <a:rPr sz="1300" b="1">
+                          <a:solidFill>
+                            <a:srgbClr val="C0392B"/>
+                          </a:solidFill>
+                          <a:latin typeface="Pretendard"/>
+                          <a:ea typeface="Pretendard"/>
+                          <a:cs typeface="Pretendard"/>
+                        </a:rPr>
+                        <a:t>A</a:t>
+                      </a:r>
+                    </a:p>
+                  </a:txBody>
+                  <a:tcPr anchor="ctr" marL="63500" marR="63500" marT="38100" marB="38100">
+                    <a:solidFill>
+                      <a:srgbClr val="F2F2F2"/>
+                    </a:solidFill>
+                  </a:tcPr>
+                </a:tc>
+                <a:tc>
+                  <a:txBody>
+                    <a:bodyPr wrap="square"/>
+                    <a:lstStyle/>
+                    <a:p>
+                      <a:pPr algn="ctr"/>
+                      <a:r>
+                        <a:rPr sz="1300" b="1">
+                          <a:solidFill>
+                            <a:srgbClr val="2E75D6"/>
+                          </a:solidFill>
+                          <a:latin typeface="Pretendard"/>
+                          <a:ea typeface="Pretendard"/>
+                          <a:cs typeface="Pretendard"/>
+                        </a:rPr>
+                        <a:t>R</a:t>
+                      </a:r>
+                    </a:p>
+                  </a:txBody>
+                  <a:tcPr anchor="ctr" marL="63500" marR="63500" marT="38100" marB="38100">
+                    <a:solidFill>
+                      <a:srgbClr val="F2F2F2"/>
+                    </a:solidFill>
+                  </a:tcPr>
+                </a:tc>
+                <a:tc>
+                  <a:txBody>
+                    <a:bodyPr wrap="square"/>
+                    <a:lstStyle/>
+                    <a:p>
+                      <a:pPr algn="ctr"/>
+                      <a:r>
+                        <a:rPr sz="1300" b="0">
+                          <a:solidFill>
+                            <a:srgbClr val="1F9E8F"/>
+                          </a:solidFill>
+                          <a:latin typeface="Pretendard"/>
+                          <a:ea typeface="Pretendard"/>
+                          <a:cs typeface="Pretendard"/>
+                        </a:rPr>
+                        <a:t>C</a:t>
+                      </a:r>
+                    </a:p>
+                  </a:txBody>
+                  <a:tcPr anchor="ctr" marL="63500" marR="63500" marT="38100" marB="38100">
+                    <a:solidFill>
+                      <a:srgbClr val="F2F2F2"/>
+                    </a:solidFill>
+                  </a:tcPr>
+                </a:tc>
+                <a:tc>
+                  <a:txBody>
+                    <a:bodyPr wrap="square"/>
+                    <a:lstStyle/>
+                    <a:p>
+                      <a:pPr algn="ctr"/>
+                      <a:r>
+                        <a:rPr sz="1300" b="0">
+                          <a:solidFill>
+                            <a:srgbClr val="1F9E8F"/>
+                          </a:solidFill>
+                          <a:latin typeface="Pretendard"/>
+                          <a:ea typeface="Pretendard"/>
+                          <a:cs typeface="Pretendard"/>
+                        </a:rPr>
+                        <a:t>C</a:t>
+                      </a:r>
+                    </a:p>
+                  </a:txBody>
+                  <a:tcPr anchor="ctr" marL="63500" marR="63500" marT="38100" marB="38100">
+                    <a:solidFill>
+                      <a:srgbClr val="F2F2F2"/>
+                    </a:solidFill>
+                  </a:tcPr>
+                </a:tc>
+                <a:tc>
+                  <a:txBody>
+                    <a:bodyPr wrap="square"/>
+                    <a:lstStyle/>
+                    <a:p>
+                      <a:pPr algn="ctr"/>
+                      <a:r>
+                        <a:rPr sz="1300" b="0">
+                          <a:solidFill>
+                            <a:srgbClr val="595959"/>
+                          </a:solidFill>
+                          <a:latin typeface="Pretendard"/>
+                          <a:ea typeface="Pretendard"/>
+                          <a:cs typeface="Pretendard"/>
+                        </a:rPr>
+                        <a:t>I</a:t>
+                      </a:r>
+                    </a:p>
+                  </a:txBody>
+                  <a:tcPr anchor="ctr" marL="63500" marR="63500" marT="38100" marB="38100">
+                    <a:solidFill>
+                      <a:srgbClr val="F2F2F2"/>
+                    </a:solidFill>
+                  </a:tcPr>
+                </a:tc>
+              </a:tr>
+              <a:tr h="457200">
+                <a:tc>
+                  <a:txBody>
+                    <a:bodyPr wrap="square"/>
+                    <a:lstStyle/>
+                    <a:p>
+                      <a:pPr algn="l"/>
+                      <a:r>
+                        <a:rPr sz="1100" b="1">
+                          <a:solidFill>
+                            <a:srgbClr val="222222"/>
+                          </a:solidFill>
+                          <a:latin typeface="Pretendard"/>
+                          <a:ea typeface="Pretendard"/>
+                          <a:cs typeface="Pretendard"/>
+                        </a:rPr>
+                        <a:t>플랫폼 설계·개발</a:t>
+                      </a:r>
+                    </a:p>
+                  </a:txBody>
+                  <a:tcPr anchor="ctr" marL="63500" marR="63500" marT="38100" marB="38100">
+                    <a:solidFill>
+                      <a:srgbClr val="FFFFFF"/>
+                    </a:solidFill>
+                  </a:tcPr>
+                </a:tc>
+                <a:tc>
+                  <a:txBody>
+                    <a:bodyPr wrap="square"/>
+                    <a:lstStyle/>
+                    <a:p>
+                      <a:pPr algn="ctr"/>
+                      <a:r>
+                        <a:rPr sz="1300" b="1">
+                          <a:solidFill>
+                            <a:srgbClr val="C0392B"/>
+                          </a:solidFill>
+                          <a:latin typeface="Pretendard"/>
+                          <a:ea typeface="Pretendard"/>
+                          <a:cs typeface="Pretendard"/>
+                        </a:rPr>
+                        <a:t>A</a:t>
+                      </a:r>
+                    </a:p>
+                  </a:txBody>
+                  <a:tcPr anchor="ctr" marL="63500" marR="63500" marT="38100" marB="38100">
+                    <a:solidFill>
+                      <a:srgbClr val="FFFFFF"/>
+                    </a:solidFill>
+                  </a:tcPr>
+                </a:tc>
+                <a:tc>
+                  <a:txBody>
+                    <a:bodyPr wrap="square"/>
+                    <a:lstStyle/>
+                    <a:p>
+                      <a:pPr algn="ctr"/>
+                      <a:r>
+                        <a:rPr sz="1300" b="0">
+                          <a:solidFill>
+                            <a:srgbClr val="1F9E8F"/>
+                          </a:solidFill>
+                          <a:latin typeface="Pretendard"/>
+                          <a:ea typeface="Pretendard"/>
+                          <a:cs typeface="Pretendard"/>
+                        </a:rPr>
+                        <a:t>C</a:t>
+                      </a:r>
+                    </a:p>
+                  </a:txBody>
+                  <a:tcPr anchor="ctr" marL="63500" marR="63500" marT="38100" marB="38100">
+                    <a:solidFill>
+                      <a:srgbClr val="FFFFFF"/>
+                    </a:solidFill>
+                  </a:tcPr>
+                </a:tc>
+                <a:tc>
+                  <a:txBody>
+                    <a:bodyPr wrap="square"/>
+                    <a:lstStyle/>
+                    <a:p>
+                      <a:pPr algn="ctr"/>
+                      <a:r>
+                        <a:rPr sz="1300" b="1">
+                          <a:solidFill>
+                            <a:srgbClr val="2E75D6"/>
+                          </a:solidFill>
+                          <a:latin typeface="Pretendard"/>
+                          <a:ea typeface="Pretendard"/>
+                          <a:cs typeface="Pretendard"/>
+                        </a:rPr>
+                        <a:t>R</a:t>
+                      </a:r>
+                    </a:p>
+                  </a:txBody>
+                  <a:tcPr anchor="ctr" marL="63500" marR="63500" marT="38100" marB="38100">
+                    <a:solidFill>
+                      <a:srgbClr val="FFFFFF"/>
+                    </a:solidFill>
+                  </a:tcPr>
+                </a:tc>
+                <a:tc>
+                  <a:txBody>
+                    <a:bodyPr wrap="square"/>
+                    <a:lstStyle/>
+                    <a:p>
+                      <a:pPr algn="ctr"/>
+                      <a:r>
+                        <a:rPr sz="1300" b="0">
+                          <a:solidFill>
+                            <a:srgbClr val="595959"/>
+                          </a:solidFill>
+                          <a:latin typeface="Pretendard"/>
+                          <a:ea typeface="Pretendard"/>
+                          <a:cs typeface="Pretendard"/>
+                        </a:rPr>
+                        <a:t>I</a:t>
+                      </a:r>
+                    </a:p>
+                  </a:txBody>
+                  <a:tcPr anchor="ctr" marL="63500" marR="63500" marT="38100" marB="38100">
+                    <a:solidFill>
+                      <a:srgbClr val="FFFFFF"/>
+                    </a:solidFill>
+                  </a:tcPr>
+                </a:tc>
+                <a:tc>
+                  <a:txBody>
+                    <a:bodyPr wrap="square"/>
+                    <a:lstStyle/>
+                    <a:p>
+                      <a:pPr algn="ctr"/>
+                      <a:r>
+                        <a:rPr sz="1300" b="0">
+                          <a:solidFill>
+                            <a:srgbClr val="1F9E8F"/>
+                          </a:solidFill>
+                          <a:latin typeface="Pretendard"/>
+                          <a:ea typeface="Pretendard"/>
+                          <a:cs typeface="Pretendard"/>
+                        </a:rPr>
+                        <a:t>C</a:t>
+                      </a:r>
+                    </a:p>
+                  </a:txBody>
+                  <a:tcPr anchor="ctr" marL="63500" marR="63500" marT="38100" marB="38100">
+                    <a:solidFill>
+                      <a:srgbClr val="FFFFFF"/>
+                    </a:solidFill>
+                  </a:tcPr>
+                </a:tc>
+              </a:tr>
+              <a:tr h="457200">
+                <a:tc>
+                  <a:txBody>
+                    <a:bodyPr wrap="square"/>
+                    <a:lstStyle/>
+                    <a:p>
+                      <a:pPr algn="l"/>
+                      <a:r>
+                        <a:rPr sz="1100" b="1">
+                          <a:solidFill>
+                            <a:srgbClr val="222222"/>
+                          </a:solidFill>
+                          <a:latin typeface="Pretendard"/>
+                          <a:ea typeface="Pretendard"/>
+                          <a:cs typeface="Pretendard"/>
+                        </a:rPr>
+                        <a:t>콘텐츠 현지화</a:t>
+                      </a:r>
+                    </a:p>
+                  </a:txBody>
+                  <a:tcPr anchor="ctr" marL="63500" marR="63500" marT="38100" marB="38100">
+                    <a:solidFill>
+                      <a:srgbClr val="F2F2F2"/>
+                    </a:solidFill>
+                  </a:tcPr>
+                </a:tc>
+                <a:tc>
+                  <a:txBody>
+                    <a:bodyPr wrap="square"/>
+                    <a:lstStyle/>
+                    <a:p>
+                      <a:pPr algn="ctr"/>
+                      <a:r>
+                        <a:rPr sz="1300" b="1">
+                          <a:solidFill>
+                            <a:srgbClr val="C0392B"/>
+                          </a:solidFill>
+                          <a:latin typeface="Pretendard"/>
+                          <a:ea typeface="Pretendard"/>
+                          <a:cs typeface="Pretendard"/>
+                        </a:rPr>
+                        <a:t>A</a:t>
+                      </a:r>
+                    </a:p>
+                  </a:txBody>
+                  <a:tcPr anchor="ctr" marL="63500" marR="63500" marT="38100" marB="38100">
+                    <a:solidFill>
+                      <a:srgbClr val="F2F2F2"/>
+                    </a:solidFill>
+                  </a:tcPr>
+                </a:tc>
+                <a:tc>
+                  <a:txBody>
+                    <a:bodyPr wrap="square"/>
+                    <a:lstStyle/>
+                    <a:p>
+                      <a:pPr algn="ctr"/>
+                      <a:r>
+                        <a:rPr sz="1300" b="0">
+                          <a:solidFill>
+                            <a:srgbClr val="595959"/>
+                          </a:solidFill>
+                          <a:latin typeface="Pretendard"/>
+                          <a:ea typeface="Pretendard"/>
+                          <a:cs typeface="Pretendard"/>
+                        </a:rPr>
+                        <a:t>I</a:t>
+                      </a:r>
+                    </a:p>
+                  </a:txBody>
+                  <a:tcPr anchor="ctr" marL="63500" marR="63500" marT="38100" marB="38100">
+                    <a:solidFill>
+                      <a:srgbClr val="F2F2F2"/>
+                    </a:solidFill>
+                  </a:tcPr>
+                </a:tc>
+                <a:tc>
+                  <a:txBody>
+                    <a:bodyPr wrap="square"/>
+                    <a:lstStyle/>
+                    <a:p>
+                      <a:pPr algn="ctr"/>
+                      <a:r>
+                        <a:rPr sz="1300" b="0">
+                          <a:solidFill>
+                            <a:srgbClr val="1F9E8F"/>
+                          </a:solidFill>
+                          <a:latin typeface="Pretendard"/>
+                          <a:ea typeface="Pretendard"/>
+                          <a:cs typeface="Pretendard"/>
+                        </a:rPr>
+                        <a:t>C</a:t>
+                      </a:r>
+                    </a:p>
+                  </a:txBody>
+                  <a:tcPr anchor="ctr" marL="63500" marR="63500" marT="38100" marB="38100">
+                    <a:solidFill>
+                      <a:srgbClr val="F2F2F2"/>
+                    </a:solidFill>
+                  </a:tcPr>
+                </a:tc>
+                <a:tc>
+                  <a:txBody>
+                    <a:bodyPr wrap="square"/>
+                    <a:lstStyle/>
+                    <a:p>
+                      <a:pPr algn="ctr"/>
+                      <a:r>
+                        <a:rPr sz="1300" b="1">
+                          <a:solidFill>
+                            <a:srgbClr val="2E75D6"/>
+                          </a:solidFill>
+                          <a:latin typeface="Pretendard"/>
+                          <a:ea typeface="Pretendard"/>
+                          <a:cs typeface="Pretendard"/>
+                        </a:rPr>
+                        <a:t>R</a:t>
+                      </a:r>
+                    </a:p>
+                  </a:txBody>
+                  <a:tcPr anchor="ctr" marL="63500" marR="63500" marT="38100" marB="38100">
+                    <a:solidFill>
+                      <a:srgbClr val="F2F2F2"/>
+                    </a:solidFill>
+                  </a:tcPr>
+                </a:tc>
+                <a:tc>
+                  <a:txBody>
+                    <a:bodyPr wrap="square"/>
+                    <a:lstStyle/>
+                    <a:p>
+                      <a:pPr algn="ctr"/>
+                      <a:r>
+                        <a:rPr sz="1300" b="0">
+                          <a:solidFill>
+                            <a:srgbClr val="1F9E8F"/>
+                          </a:solidFill>
+                          <a:latin typeface="Pretendard"/>
+                          <a:ea typeface="Pretendard"/>
+                          <a:cs typeface="Pretendard"/>
+                        </a:rPr>
+                        <a:t>C</a:t>
+                      </a:r>
+                    </a:p>
+                  </a:txBody>
+                  <a:tcPr anchor="ctr" marL="63500" marR="63500" marT="38100" marB="38100">
+                    <a:solidFill>
+                      <a:srgbClr val="F2F2F2"/>
+                    </a:solidFill>
+                  </a:tcPr>
+                </a:tc>
+              </a:tr>
+              <a:tr h="457200">
+                <a:tc>
+                  <a:txBody>
+                    <a:bodyPr wrap="square"/>
+                    <a:lstStyle/>
+                    <a:p>
+                      <a:pPr algn="l"/>
+                      <a:r>
+                        <a:rPr sz="1100" b="1">
+                          <a:solidFill>
+                            <a:srgbClr val="222222"/>
+                          </a:solidFill>
+                          <a:latin typeface="Pretendard"/>
+                          <a:ea typeface="Pretendard"/>
+                          <a:cs typeface="Pretendard"/>
+                        </a:rPr>
+                        <a:t>통합 QA 테스트</a:t>
+                      </a:r>
+                    </a:p>
+                  </a:txBody>
+                  <a:tcPr anchor="ctr" marL="63500" marR="63500" marT="38100" marB="38100">
+                    <a:solidFill>
+                      <a:srgbClr val="FFFFFF"/>
+                    </a:solidFill>
+                  </a:tcPr>
+                </a:tc>
+                <a:tc>
+                  <a:txBody>
+                    <a:bodyPr wrap="square"/>
+                    <a:lstStyle/>
+                    <a:p>
+                      <a:pPr algn="ctr"/>
+                      <a:r>
+                        <a:rPr sz="1300" b="1">
+                          <a:solidFill>
+                            <a:srgbClr val="C0392B"/>
+                          </a:solidFill>
+                          <a:latin typeface="Pretendard"/>
+                          <a:ea typeface="Pretendard"/>
+                          <a:cs typeface="Pretendard"/>
+                        </a:rPr>
+                        <a:t>A</a:t>
+                      </a:r>
+                    </a:p>
+                  </a:txBody>
+                  <a:tcPr anchor="ctr" marL="63500" marR="63500" marT="38100" marB="38100">
+                    <a:solidFill>
+                      <a:srgbClr val="FFFFFF"/>
+                    </a:solidFill>
+                  </a:tcPr>
+                </a:tc>
+                <a:tc>
+                  <a:txBody>
+                    <a:bodyPr wrap="square"/>
+                    <a:lstStyle/>
+                    <a:p>
+                      <a:pPr algn="ctr"/>
+                      <a:r>
+                        <a:rPr sz="1300" b="0">
+                          <a:solidFill>
+                            <a:srgbClr val="595959"/>
+                          </a:solidFill>
+                          <a:latin typeface="Pretendard"/>
+                          <a:ea typeface="Pretendard"/>
+                          <a:cs typeface="Pretendard"/>
+                        </a:rPr>
+                        <a:t>I</a:t>
+                      </a:r>
+                    </a:p>
+                  </a:txBody>
+                  <a:tcPr anchor="ctr" marL="63500" marR="63500" marT="38100" marB="38100">
+                    <a:solidFill>
+                      <a:srgbClr val="FFFFFF"/>
+                    </a:solidFill>
+                  </a:tcPr>
+                </a:tc>
+                <a:tc>
+                  <a:txBody>
+                    <a:bodyPr wrap="square"/>
+                    <a:lstStyle/>
+                    <a:p>
+                      <a:pPr algn="ctr"/>
+                      <a:r>
+                        <a:rPr sz="1300" b="0">
+                          <a:solidFill>
+                            <a:srgbClr val="1F9E8F"/>
+                          </a:solidFill>
+                          <a:latin typeface="Pretendard"/>
+                          <a:ea typeface="Pretendard"/>
+                          <a:cs typeface="Pretendard"/>
+                        </a:rPr>
+                        <a:t>C</a:t>
+                      </a:r>
+                    </a:p>
+                  </a:txBody>
+                  <a:tcPr anchor="ctr" marL="63500" marR="63500" marT="38100" marB="38100">
+                    <a:solidFill>
+                      <a:srgbClr val="FFFFFF"/>
+                    </a:solidFill>
+                  </a:tcPr>
+                </a:tc>
+                <a:tc>
+                  <a:txBody>
+                    <a:bodyPr wrap="square"/>
+                    <a:lstStyle/>
+                    <a:p>
+                      <a:pPr algn="ctr"/>
+                      <a:r>
+                        <a:rPr sz="1300" b="0">
+                          <a:solidFill>
+                            <a:srgbClr val="1F9E8F"/>
+                          </a:solidFill>
+                          <a:latin typeface="Pretendard"/>
+                          <a:ea typeface="Pretendard"/>
+                          <a:cs typeface="Pretendard"/>
+                        </a:rPr>
+                        <a:t>C</a:t>
+                      </a:r>
+                    </a:p>
+                  </a:txBody>
+                  <a:tcPr anchor="ctr" marL="63500" marR="63500" marT="38100" marB="38100">
+                    <a:solidFill>
+                      <a:srgbClr val="FFFFFF"/>
+                    </a:solidFill>
+                  </a:tcPr>
+                </a:tc>
+                <a:tc>
+                  <a:txBody>
+                    <a:bodyPr wrap="square"/>
+                    <a:lstStyle/>
+                    <a:p>
+                      <a:pPr algn="ctr"/>
+                      <a:r>
+                        <a:rPr sz="1300" b="1">
+                          <a:solidFill>
+                            <a:srgbClr val="2E75D6"/>
+                          </a:solidFill>
+                          <a:latin typeface="Pretendard"/>
+                          <a:ea typeface="Pretendard"/>
+                          <a:cs typeface="Pretendard"/>
+                        </a:rPr>
+                        <a:t>R</a:t>
+                      </a:r>
+                    </a:p>
+                  </a:txBody>
+                  <a:tcPr anchor="ctr" marL="63500" marR="63500" marT="38100" marB="38100">
+                    <a:solidFill>
+                      <a:srgbClr val="FFFFFF"/>
+                    </a:solidFill>
+                  </a:tcPr>
+                </a:tc>
+              </a:tr>
+              <a:tr h="457200">
+                <a:tc>
+                  <a:txBody>
+                    <a:bodyPr wrap="square"/>
+                    <a:lstStyle/>
+                    <a:p>
+                      <a:pPr algn="l"/>
+                      <a:r>
+                        <a:rPr sz="1100" b="1">
+                          <a:solidFill>
+                            <a:srgbClr val="222222"/>
+                          </a:solidFill>
+                          <a:latin typeface="Pretendard"/>
+                          <a:ea typeface="Pretendard"/>
+                          <a:cs typeface="Pretendard"/>
+                        </a:rPr>
+                        <a:t>발주처 보고·검수</a:t>
+                      </a:r>
+                    </a:p>
+                  </a:txBody>
+                  <a:tcPr anchor="ctr" marL="63500" marR="63500" marT="38100" marB="38100">
+                    <a:solidFill>
+                      <a:srgbClr val="F2F2F2"/>
+                    </a:solidFill>
+                  </a:tcPr>
+                </a:tc>
+                <a:tc>
+                  <a:txBody>
+                    <a:bodyPr wrap="square"/>
+                    <a:lstStyle/>
+                    <a:p>
+                      <a:pPr algn="ctr"/>
+                      <a:r>
+                        <a:rPr sz="1300" b="1">
+                          <a:solidFill>
+                            <a:srgbClr val="C0392B"/>
+                          </a:solidFill>
+                          <a:latin typeface="Pretendard"/>
+                          <a:ea typeface="Pretendard"/>
+                          <a:cs typeface="Pretendard"/>
+                        </a:rPr>
+                        <a:t>A</a:t>
+                      </a:r>
+                    </a:p>
+                  </a:txBody>
+                  <a:tcPr anchor="ctr" marL="63500" marR="63500" marT="38100" marB="38100">
+                    <a:solidFill>
+                      <a:srgbClr val="F2F2F2"/>
+                    </a:solidFill>
+                  </a:tcPr>
+                </a:tc>
+                <a:tc>
+                  <a:txBody>
+                    <a:bodyPr wrap="square"/>
+                    <a:lstStyle/>
+                    <a:p>
+                      <a:pPr algn="ctr"/>
+                      <a:r>
+                        <a:rPr sz="1300" b="1">
+                          <a:solidFill>
+                            <a:srgbClr val="2E75D6"/>
+                          </a:solidFill>
+                          <a:latin typeface="Pretendard"/>
+                          <a:ea typeface="Pretendard"/>
+                          <a:cs typeface="Pretendard"/>
+                        </a:rPr>
+                        <a:t>R</a:t>
+                      </a:r>
+                    </a:p>
+                  </a:txBody>
+                  <a:tcPr anchor="ctr" marL="63500" marR="63500" marT="38100" marB="38100">
+                    <a:solidFill>
+                      <a:srgbClr val="F2F2F2"/>
+                    </a:solidFill>
+                  </a:tcPr>
+                </a:tc>
+                <a:tc>
+                  <a:txBody>
+                    <a:bodyPr wrap="square"/>
+                    <a:lstStyle/>
+                    <a:p>
+                      <a:pPr algn="ctr"/>
+                      <a:r>
+                        <a:rPr sz="1300" b="0">
+                          <a:solidFill>
+                            <a:srgbClr val="595959"/>
+                          </a:solidFill>
+                          <a:latin typeface="Pretendard"/>
+                          <a:ea typeface="Pretendard"/>
+                          <a:cs typeface="Pretendard"/>
+                        </a:rPr>
+                        <a:t>I</a:t>
+                      </a:r>
+                    </a:p>
+                  </a:txBody>
+                  <a:tcPr anchor="ctr" marL="63500" marR="63500" marT="38100" marB="38100">
+                    <a:solidFill>
+                      <a:srgbClr val="F2F2F2"/>
+                    </a:solidFill>
+                  </a:tcPr>
+                </a:tc>
+                <a:tc>
+                  <a:txBody>
+                    <a:bodyPr wrap="square"/>
+                    <a:lstStyle/>
+                    <a:p>
+                      <a:pPr algn="ctr"/>
+                      <a:r>
+                        <a:rPr sz="1300" b="0">
+                          <a:solidFill>
+                            <a:srgbClr val="595959"/>
+                          </a:solidFill>
+                          <a:latin typeface="Pretendard"/>
+                          <a:ea typeface="Pretendard"/>
+                          <a:cs typeface="Pretendard"/>
+                        </a:rPr>
+                        <a:t>I</a:t>
+                      </a:r>
+                    </a:p>
+                  </a:txBody>
+                  <a:tcPr anchor="ctr" marL="63500" marR="63500" marT="38100" marB="38100">
+                    <a:solidFill>
+                      <a:srgbClr val="F2F2F2"/>
+                    </a:solidFill>
+                  </a:tcPr>
+                </a:tc>
+                <a:tc>
+                  <a:txBody>
+                    <a:bodyPr wrap="square"/>
+                    <a:lstStyle/>
+                    <a:p>
+                      <a:pPr algn="ctr"/>
+                      <a:r>
+                        <a:rPr sz="1300" b="0">
+                          <a:solidFill>
+                            <a:srgbClr val="595959"/>
+                          </a:solidFill>
+                          <a:latin typeface="Pretendard"/>
+                          <a:ea typeface="Pretendard"/>
+                          <a:cs typeface="Pretendard"/>
+                        </a:rPr>
+                        <a:t>I</a:t>
+                      </a:r>
+                    </a:p>
+                  </a:txBody>
+                  <a:tcPr anchor="ctr" marL="63500" marR="63500" marT="38100" marB="38100">
+                    <a:solidFill>
+                      <a:srgbClr val="F2F2F2"/>
+                    </a:solidFill>
+                  </a:tcPr>
+                </a:tc>
+              </a:tr>
+              <a:tr h="457200">
+                <a:tc>
+                  <a:txBody>
+                    <a:bodyPr wrap="square"/>
+                    <a:lstStyle/>
+                    <a:p>
+                      <a:pPr algn="l"/>
+                      <a:r>
+                        <a:rPr sz="1100" b="1">
+                          <a:solidFill>
+                            <a:srgbClr val="222222"/>
+                          </a:solidFill>
+                          <a:latin typeface="Pretendard"/>
+                          <a:ea typeface="Pretendard"/>
+                          <a:cs typeface="Pretendard"/>
+                        </a:rPr>
+                        <a:t>안정화·운영 이관</a:t>
+                      </a:r>
+                    </a:p>
+                  </a:txBody>
+                  <a:tcPr anchor="ctr" marL="63500" marR="63500" marT="38100" marB="38100">
+                    <a:solidFill>
+                      <a:srgbClr val="FFFFFF"/>
+                    </a:solidFill>
+                  </a:tcPr>
+                </a:tc>
+                <a:tc>
+                  <a:txBody>
+                    <a:bodyPr wrap="square"/>
+                    <a:lstStyle/>
+                    <a:p>
+                      <a:pPr algn="ctr"/>
+                      <a:r>
+                        <a:rPr sz="1300" b="1">
+                          <a:solidFill>
+                            <a:srgbClr val="C0392B"/>
+                          </a:solidFill>
+                          <a:latin typeface="Pretendard"/>
+                          <a:ea typeface="Pretendard"/>
+                          <a:cs typeface="Pretendard"/>
+                        </a:rPr>
+                        <a:t>A</a:t>
+                      </a:r>
+                    </a:p>
+                  </a:txBody>
+                  <a:tcPr anchor="ctr" marL="63500" marR="63500" marT="38100" marB="38100">
+                    <a:solidFill>
+                      <a:srgbClr val="FFFFFF"/>
+                    </a:solidFill>
+                  </a:tcPr>
+                </a:tc>
+                <a:tc>
+                  <a:txBody>
+                    <a:bodyPr wrap="square"/>
+                    <a:lstStyle/>
+                    <a:p>
+                      <a:pPr algn="ctr"/>
+                      <a:r>
+                        <a:rPr sz="1300" b="0">
+                          <a:solidFill>
+                            <a:srgbClr val="595959"/>
+                          </a:solidFill>
+                          <a:latin typeface="Pretendard"/>
+                          <a:ea typeface="Pretendard"/>
+                          <a:cs typeface="Pretendard"/>
+                        </a:rPr>
+                        <a:t>I</a:t>
+                      </a:r>
+                    </a:p>
+                  </a:txBody>
+                  <a:tcPr anchor="ctr" marL="63500" marR="63500" marT="38100" marB="38100">
+                    <a:solidFill>
+                      <a:srgbClr val="FFFFFF"/>
+                    </a:solidFill>
+                  </a:tcPr>
+                </a:tc>
+                <a:tc>
+                  <a:txBody>
+                    <a:bodyPr wrap="square"/>
+                    <a:lstStyle/>
+                    <a:p>
+                      <a:pPr algn="ctr"/>
+                      <a:r>
+                        <a:rPr sz="1300" b="1">
+                          <a:solidFill>
+                            <a:srgbClr val="2E75D6"/>
+                          </a:solidFill>
+                          <a:latin typeface="Pretendard"/>
+                          <a:ea typeface="Pretendard"/>
+                          <a:cs typeface="Pretendard"/>
+                        </a:rPr>
+                        <a:t>R</a:t>
+                      </a:r>
+                    </a:p>
+                  </a:txBody>
+                  <a:tcPr anchor="ctr" marL="63500" marR="63500" marT="38100" marB="38100">
+                    <a:solidFill>
+                      <a:srgbClr val="FFFFFF"/>
+                    </a:solidFill>
+                  </a:tcPr>
+                </a:tc>
+                <a:tc>
+                  <a:txBody>
+                    <a:bodyPr wrap="square"/>
+                    <a:lstStyle/>
+                    <a:p>
+                      <a:pPr algn="ctr"/>
+                      <a:r>
+                        <a:rPr sz="1300" b="0">
+                          <a:solidFill>
+                            <a:srgbClr val="1F9E8F"/>
+                          </a:solidFill>
+                          <a:latin typeface="Pretendard"/>
+                          <a:ea typeface="Pretendard"/>
+                          <a:cs typeface="Pretendard"/>
+                        </a:rPr>
+                        <a:t>C</a:t>
+                      </a:r>
+                    </a:p>
+                  </a:txBody>
+                  <a:tcPr anchor="ctr" marL="63500" marR="63500" marT="38100" marB="38100">
+                    <a:solidFill>
+                      <a:srgbClr val="FFFFFF"/>
+                    </a:solidFill>
+                  </a:tcPr>
+                </a:tc>
+                <a:tc>
+                  <a:txBody>
+                    <a:bodyPr wrap="square"/>
+                    <a:lstStyle/>
+                    <a:p>
+                      <a:pPr algn="ctr"/>
+                      <a:r>
+                        <a:rPr sz="1300" b="1">
+                          <a:solidFill>
+                            <a:srgbClr val="2E75D6"/>
+                          </a:solidFill>
+                          <a:latin typeface="Pretendard"/>
+                          <a:ea typeface="Pretendard"/>
+                          <a:cs typeface="Pretendard"/>
+                        </a:rPr>
+                        <a:t>R</a:t>
+                      </a:r>
+                    </a:p>
+                  </a:txBody>
+                  <a:tcPr anchor="ctr" marL="63500" marR="63500" marT="38100" marB="38100">
+                    <a:solidFill>
+                      <a:srgbClr val="FFFFFF"/>
+                    </a:solidFill>
+                  </a:tcPr>
+                </a:tc>
+              </a:tr>
+              <a:tr h="457200">
+                <a:tc gridSpan="6">
+                  <a:txBody>
+                    <a:bodyPr wrap="square"/>
+                    <a:lstStyle/>
+                    <a:p>
+                      <a:pPr algn="ctr"/>
+                      <a:r>
+                        <a:rPr sz="1000" b="1">
+                          <a:solidFill>
+                            <a:srgbClr val="595959"/>
+                          </a:solidFill>
+                          <a:latin typeface="Pretendard"/>
+                          <a:ea typeface="Pretendard"/>
+                          <a:cs typeface="Pretendard"/>
+                        </a:rPr>
+                        <a:t>R 실무 담당(Responsible)   ·   A 최종 책임(Accountable)   ·   C 자문(Consulted)   ·   I 결과 공유(Informed)</a:t>
+                      </a:r>
+                    </a:p>
+                  </a:txBody>
+                  <a:tcPr anchor="ctr" marL="63500" marR="63500" marT="38100" marB="38100">
+                    <a:solidFill>
+                      <a:srgbClr val="F7F9FC"/>
+                    </a:solidFill>
+                  </a:tcPr>
+                </a:tc>
+                <a:tc hMerge="1">
+                  <a:txBody>
+                    <a:bodyPr/>
+                    <a:lstStyle/>
+                    <a:p/>
+                  </a:txBody>
+                  <a:tcPr/>
+                </a:tc>
+                <a:tc hMerge="1">
+                  <a:txBody>
+                    <a:bodyPr/>
+                    <a:lstStyle/>
+                    <a:p/>
+                  </a:txBody>
+                  <a:tcPr/>
+                </a:tc>
+                <a:tc hMerge="1">
+                  <a:txBody>
+                    <a:bodyPr/>
+                    <a:lstStyle/>
+                    <a:p/>
+                  </a:txBody>
+                  <a:tcPr/>
+                </a:tc>
+                <a:tc hMerge="1">
+                  <a:txBody>
+                    <a:bodyPr/>
+                    <a:lstStyle/>
+                    <a:p/>
+                  </a:txBody>
+                  <a:tcPr/>
+                </a:tc>
+                <a:tc hMerge="1">
+                  <a:txBody>
+                    <a:bodyPr/>
+                    <a:lstStyle/>
+                    <a:p/>
+                  </a:txBody>
+                  <a:tcPr/>
+                </a:tc>
+              </a:tr>
+            </a:tbl>
+          </a:graphicData>
+        </a:graphic>
+      </p:graphicFrame>
     </p:spTree>
   </p:cSld>
   <p:clrMapOvr>
@@ -6252,1079 +6237,1064 @@
         <p:nvPr/>
       </p:nvGrpSpPr>
       <p:grpSpPr/>
-      <p:grpSp>
-        <p:nvGrpSpPr>
-          <p:cNvPr id="6" name="asset:ORG-013"/>
-          <p:cNvGrpSpPr/>
+      <p:sp>
+        <p:nvSpPr>
+          <p:cNvPr id="2" name="TextBox 1"/>
+          <p:cNvSpPr txBox="1"/>
           <p:nvPr/>
-        </p:nvGrpSpPr>
-        <p:grpSpPr>
+        </p:nvSpPr>
+        <p:spPr>
           <a:xfrm>
             <a:off x="137160" y="73152"/>
-            <a:ext cx="11521440" cy="4800600"/>
-            <a:chOff x="137160" y="73152"/>
-            <a:chExt cx="11521440" cy="4800600"/>
+            <a:ext cx="3657600" cy="274320"/>
           </a:xfrm>
-        </p:grpSpPr>
-        <p:sp>
-          <p:nvSpPr>
-            <p:cNvPr id="2" name="TextBox 1"/>
-            <p:cNvSpPr txBox="1"/>
-            <p:nvPr/>
-          </p:nvSpPr>
-          <p:spPr>
-            <a:xfrm>
-              <a:off x="137160" y="73152"/>
-              <a:ext cx="3657600" cy="274320"/>
-            </a:xfrm>
-            <a:prstGeom prst="rect">
-              <a:avLst/>
-            </a:prstGeom>
-            <a:noFill/>
-          </p:spPr>
-          <p:txBody>
-            <a:bodyPr wrap="square" anchor="ctr" lIns="38100" rIns="38100" tIns="25400" bIns="25400">
-              <a:spAutoFit/>
-            </a:bodyPr>
-            <a:lstStyle/>
-            <a:p>
-              <a:pPr algn="l"/>
-              <a:r>
-                <a:rPr sz="900" b="1">
-                  <a:solidFill>
-                    <a:srgbClr val="808080"/>
-                  </a:solidFill>
-                  <a:latin typeface="Pretendard"/>
-                  <a:ea typeface="Pretendard"/>
-                  <a:cs typeface="Pretendard"/>
-                </a:rPr>
-                <a:t>ORG-013 · 컨소시엄 역할분담표</a:t>
-              </a:r>
-            </a:p>
-          </p:txBody>
-        </p:sp>
-        <p:sp>
-          <p:nvSpPr>
-            <p:cNvPr id="3" name="TextBox 2"/>
-            <p:cNvSpPr txBox="1"/>
-            <p:nvPr/>
-          </p:nvSpPr>
-          <p:spPr>
-            <a:xfrm>
-              <a:off x="502920" y="457200"/>
-              <a:ext cx="11155680" cy="457200"/>
-            </a:xfrm>
-            <a:prstGeom prst="rect">
-              <a:avLst/>
-            </a:prstGeom>
-            <a:noFill/>
-          </p:spPr>
-          <p:txBody>
-            <a:bodyPr wrap="square" anchor="ctr" lIns="38100" rIns="38100" tIns="25400" bIns="25400">
-              <a:spAutoFit/>
-            </a:bodyPr>
-            <a:lstStyle/>
-            <a:p>
-              <a:pPr algn="l"/>
-              <a:r>
-                <a:rPr sz="1800" b="1">
-                  <a:solidFill>
-                    <a:srgbClr val="1F3864"/>
-                  </a:solidFill>
-                  <a:latin typeface="Pretendard"/>
-                  <a:ea typeface="Pretendard"/>
-                  <a:cs typeface="Pretendard"/>
-                </a:rPr>
-                <a:t>컨소시엄 역할분담표</a:t>
-              </a:r>
-            </a:p>
-          </p:txBody>
-        </p:sp>
-        <p:sp>
-          <p:nvSpPr>
-            <p:cNvPr id="4" name="TextBox 3"/>
-            <p:cNvSpPr txBox="1"/>
-            <p:nvPr/>
-          </p:nvSpPr>
-          <p:spPr>
-            <a:xfrm>
-              <a:off x="502920" y="914400"/>
-              <a:ext cx="11155680" cy="292608"/>
-            </a:xfrm>
-            <a:prstGeom prst="rect">
-              <a:avLst/>
-            </a:prstGeom>
-            <a:noFill/>
-          </p:spPr>
-          <p:txBody>
-            <a:bodyPr wrap="square" anchor="ctr" lIns="38100" rIns="38100" tIns="25400" bIns="25400">
-              <a:spAutoFit/>
-            </a:bodyPr>
-            <a:lstStyle/>
-            <a:p>
-              <a:pPr algn="l"/>
-              <a:r>
-                <a:rPr sz="1100" b="0">
-                  <a:solidFill>
-                    <a:srgbClr val="595959"/>
-                  </a:solidFill>
-                  <a:latin typeface="Pretendard"/>
-                  <a:ea typeface="Pretendard"/>
-                  <a:cs typeface="Pretendard"/>
-                </a:rPr>
-                <a:t>주관사·참여사 × 업무분장(WBS)별 담당·분담율</a:t>
-              </a:r>
-            </a:p>
-          </p:txBody>
-        </p:sp>
-        <p:graphicFrame>
-          <p:nvGraphicFramePr>
-            <p:cNvPr id="5" name="ORG-013_bg"/>
-            <p:cNvGraphicFramePr>
-              <a:graphicFrameLocks noGrp="1"/>
-            </p:cNvGraphicFramePr>
-            <p:nvPr/>
-          </p:nvGraphicFramePr>
-          <p:xfrm>
-            <a:off x="822960" y="1463040"/>
-            <a:ext cx="10424160" cy="3410712"/>
-          </p:xfrm>
-          <a:graphic>
-            <a:graphicData uri="http://schemas.openxmlformats.org/drawingml/2006/table">
-              <a:tbl>
-                <a:tblPr>
-                  <a:tableStyleId>{5C22544A-7EE6-4342-B048-85BDC9FD1C3A}</a:tableStyleId>
-                </a:tblPr>
-                <a:tblGrid>
-                  <a:gridCol w="1828800"/>
-                  <a:gridCol w="1828800"/>
-                  <a:gridCol w="1828800"/>
-                  <a:gridCol w="1828800"/>
-                  <a:gridCol w="1828800"/>
-                  <a:gridCol w="1280160"/>
-                </a:tblGrid>
-                <a:tr h="640080">
-                  <a:tc>
-                    <a:txBody>
-                      <a:bodyPr wrap="square"/>
-                      <a:lstStyle/>
-                      <a:p>
-                        <a:pPr algn="l"/>
-                        <a:r>
-                          <a:rPr sz="1200" b="1">
-                            <a:solidFill>
-                              <a:srgbClr val="FFFFFF"/>
-                            </a:solidFill>
-                            <a:latin typeface="Pretendard"/>
-                            <a:ea typeface="Pretendard"/>
-                            <a:cs typeface="Pretendard"/>
-                          </a:rPr>
-                          <a:t>구분</a:t>
-                        </a:r>
-                      </a:p>
-                    </a:txBody>
-                    <a:tcPr anchor="ctr" marL="63500" marR="63500" marT="38100" marB="38100">
-                      <a:solidFill>
-                        <a:srgbClr val="1F3864"/>
-                      </a:solidFill>
-                    </a:tcPr>
-                  </a:tc>
-                  <a:tc>
-                    <a:txBody>
-                      <a:bodyPr wrap="square"/>
-                      <a:lstStyle/>
-                      <a:p>
-                        <a:pPr algn="ctr"/>
-                        <a:r>
-                          <a:rPr sz="1100" b="1">
-                            <a:solidFill>
-                              <a:srgbClr val="FFFFFF"/>
-                            </a:solidFill>
-                            <a:latin typeface="Pretendard"/>
-                            <a:ea typeface="Pretendard"/>
-                            <a:cs typeface="Pretendard"/>
-                          </a:rPr>
-                          <a:t>WP1</a:t>
-                        </a:r>
-                      </a:p>
-                      <a:p>
-                        <a:pPr algn="ctr"/>
-                        <a:r>
-                          <a:rPr sz="1100" b="1">
-                            <a:solidFill>
-                              <a:srgbClr val="FFFFFF"/>
-                            </a:solidFill>
-                            <a:latin typeface="Pretendard"/>
-                            <a:ea typeface="Pretendard"/>
-                            <a:cs typeface="Pretendard"/>
-                          </a:rPr>
-                          <a:t>플랫폼 개발</a:t>
-                        </a:r>
-                      </a:p>
-                    </a:txBody>
-                    <a:tcPr anchor="ctr" marL="63500" marR="63500" marT="38100" marB="38100">
-                      <a:solidFill>
-                        <a:srgbClr val="1F3864"/>
-                      </a:solidFill>
-                    </a:tcPr>
-                  </a:tc>
-                  <a:tc>
-                    <a:txBody>
-                      <a:bodyPr wrap="square"/>
-                      <a:lstStyle/>
-                      <a:p>
-                        <a:pPr algn="ctr"/>
-                        <a:r>
-                          <a:rPr sz="1100" b="1">
-                            <a:solidFill>
-                              <a:srgbClr val="FFFFFF"/>
-                            </a:solidFill>
-                            <a:latin typeface="Pretendard"/>
-                            <a:ea typeface="Pretendard"/>
-                            <a:cs typeface="Pretendard"/>
-                          </a:rPr>
-                          <a:t>WP2</a:t>
-                        </a:r>
-                      </a:p>
-                      <a:p>
-                        <a:pPr algn="ctr"/>
-                        <a:r>
-                          <a:rPr sz="1100" b="1">
-                            <a:solidFill>
-                              <a:srgbClr val="FFFFFF"/>
-                            </a:solidFill>
-                            <a:latin typeface="Pretendard"/>
-                            <a:ea typeface="Pretendard"/>
-                            <a:cs typeface="Pretendard"/>
-                          </a:rPr>
-                          <a:t>현지화</a:t>
-                        </a:r>
-                      </a:p>
-                    </a:txBody>
-                    <a:tcPr anchor="ctr" marL="63500" marR="63500" marT="38100" marB="38100">
-                      <a:solidFill>
-                        <a:srgbClr val="1F3864"/>
-                      </a:solidFill>
-                    </a:tcPr>
-                  </a:tc>
-                  <a:tc>
-                    <a:txBody>
-                      <a:bodyPr wrap="square"/>
-                      <a:lstStyle/>
-                      <a:p>
-                        <a:pPr algn="ctr"/>
-                        <a:r>
-                          <a:rPr sz="1100" b="1">
-                            <a:solidFill>
-                              <a:srgbClr val="FFFFFF"/>
-                            </a:solidFill>
-                            <a:latin typeface="Pretendard"/>
-                            <a:ea typeface="Pretendard"/>
-                            <a:cs typeface="Pretendard"/>
-                          </a:rPr>
-                          <a:t>WP3</a:t>
-                        </a:r>
-                      </a:p>
-                      <a:p>
-                        <a:pPr algn="ctr"/>
-                        <a:r>
-                          <a:rPr sz="1100" b="1">
-                            <a:solidFill>
-                              <a:srgbClr val="FFFFFF"/>
-                            </a:solidFill>
-                            <a:latin typeface="Pretendard"/>
-                            <a:ea typeface="Pretendard"/>
-                            <a:cs typeface="Pretendard"/>
-                          </a:rPr>
-                          <a:t>마케팅·배급</a:t>
-                        </a:r>
-                      </a:p>
-                    </a:txBody>
-                    <a:tcPr anchor="ctr" marL="63500" marR="63500" marT="38100" marB="38100">
-                      <a:solidFill>
-                        <a:srgbClr val="1F3864"/>
-                      </a:solidFill>
-                    </a:tcPr>
-                  </a:tc>
-                  <a:tc>
-                    <a:txBody>
-                      <a:bodyPr wrap="square"/>
-                      <a:lstStyle/>
-                      <a:p>
-                        <a:pPr algn="ctr"/>
-                        <a:r>
-                          <a:rPr sz="1100" b="1">
-                            <a:solidFill>
-                              <a:srgbClr val="FFFFFF"/>
-                            </a:solidFill>
-                            <a:latin typeface="Pretendard"/>
-                            <a:ea typeface="Pretendard"/>
-                            <a:cs typeface="Pretendard"/>
-                          </a:rPr>
-                          <a:t>WP4</a:t>
-                        </a:r>
-                      </a:p>
-                      <a:p>
-                        <a:pPr algn="ctr"/>
-                        <a:r>
-                          <a:rPr sz="1100" b="1">
-                            <a:solidFill>
-                              <a:srgbClr val="FFFFFF"/>
-                            </a:solidFill>
-                            <a:latin typeface="Pretendard"/>
-                            <a:ea typeface="Pretendard"/>
-                            <a:cs typeface="Pretendard"/>
-                          </a:rPr>
-                          <a:t>운영·유지보수</a:t>
-                        </a:r>
-                      </a:p>
-                    </a:txBody>
-                    <a:tcPr anchor="ctr" marL="63500" marR="63500" marT="38100" marB="38100">
-                      <a:solidFill>
-                        <a:srgbClr val="1F3864"/>
-                      </a:solidFill>
-                    </a:tcPr>
-                  </a:tc>
-                  <a:tc>
-                    <a:txBody>
-                      <a:bodyPr wrap="square"/>
-                      <a:lstStyle/>
-                      <a:p>
-                        <a:pPr algn="ctr"/>
-                        <a:r>
-                          <a:rPr sz="1200" b="1">
-                            <a:solidFill>
-                              <a:srgbClr val="FFFFFF"/>
-                            </a:solidFill>
-                            <a:latin typeface="Pretendard"/>
-                            <a:ea typeface="Pretendard"/>
-                            <a:cs typeface="Pretendard"/>
-                          </a:rPr>
-                          <a:t>분담율</a:t>
-                        </a:r>
-                      </a:p>
-                    </a:txBody>
-                    <a:tcPr anchor="ctr" marL="63500" marR="63500" marT="38100" marB="38100">
-                      <a:solidFill>
-                        <a:srgbClr val="1F3864"/>
-                      </a:solidFill>
-                    </a:tcPr>
-                  </a:tc>
-                </a:tr>
-                <a:tr h="566928">
-                  <a:tc>
-                    <a:txBody>
-                      <a:bodyPr wrap="square"/>
-                      <a:lstStyle/>
-                      <a:p>
-                        <a:pPr algn="l"/>
-                        <a:r>
-                          <a:rPr sz="1100" b="1">
-                            <a:solidFill>
-                              <a:srgbClr val="1F3864"/>
-                            </a:solidFill>
-                            <a:latin typeface="Pretendard"/>
-                            <a:ea typeface="Pretendard"/>
-                            <a:cs typeface="Pretendard"/>
-                          </a:rPr>
-                          <a:t>주관사 ㈜가</a:t>
-                        </a:r>
-                      </a:p>
-                    </a:txBody>
-                    <a:tcPr anchor="ctr" marL="63500" marR="63500" marT="38100" marB="38100">
-                      <a:solidFill>
-                        <a:srgbClr val="FFFFFF"/>
-                      </a:solidFill>
-                    </a:tcPr>
-                  </a:tc>
-                  <a:tc>
-                    <a:txBody>
-                      <a:bodyPr wrap="square"/>
-                      <a:lstStyle/>
-                      <a:p>
-                        <a:pPr algn="ctr"/>
-                        <a:r>
-                          <a:rPr sz="1400" b="1">
-                            <a:solidFill>
-                              <a:srgbClr val="2E75D6"/>
-                            </a:solidFill>
-                            <a:latin typeface="Pretendard"/>
-                            <a:ea typeface="Pretendard"/>
-                            <a:cs typeface="Pretendard"/>
-                          </a:rPr>
-                          <a:t>◎</a:t>
-                        </a:r>
-                      </a:p>
-                    </a:txBody>
-                    <a:tcPr anchor="ctr" marL="63500" marR="63500" marT="38100" marB="38100">
-                      <a:solidFill>
-                        <a:srgbClr val="FFFFFF"/>
-                      </a:solidFill>
-                    </a:tcPr>
-                  </a:tc>
-                  <a:tc>
-                    <a:txBody>
-                      <a:bodyPr wrap="square"/>
-                      <a:lstStyle/>
-                      <a:p>
-                        <a:pPr algn="ctr"/>
-                        <a:r>
-                          <a:rPr sz="1400" b="1">
-                            <a:solidFill>
-                              <a:srgbClr val="1F9E8F"/>
-                            </a:solidFill>
-                            <a:latin typeface="Pretendard"/>
-                            <a:ea typeface="Pretendard"/>
-                            <a:cs typeface="Pretendard"/>
-                          </a:rPr>
-                          <a:t>●</a:t>
-                        </a:r>
-                      </a:p>
-                    </a:txBody>
-                    <a:tcPr anchor="ctr" marL="63500" marR="63500" marT="38100" marB="38100">
-                      <a:solidFill>
-                        <a:srgbClr val="FFFFFF"/>
-                      </a:solidFill>
-                    </a:tcPr>
-                  </a:tc>
-                  <a:tc>
-                    <a:txBody>
-                      <a:bodyPr wrap="square"/>
-                      <a:lstStyle/>
-                      <a:p>
-                        <a:pPr algn="ctr"/>
-                        <a:r>
-                          <a:rPr sz="1400" b="0">
-                            <a:solidFill>
-                              <a:srgbClr val="595959"/>
-                            </a:solidFill>
-                            <a:latin typeface="Pretendard"/>
-                            <a:ea typeface="Pretendard"/>
-                            <a:cs typeface="Pretendard"/>
-                          </a:rPr>
-                          <a:t>–</a:t>
-                        </a:r>
-                      </a:p>
-                    </a:txBody>
-                    <a:tcPr anchor="ctr" marL="63500" marR="63500" marT="38100" marB="38100">
-                      <a:solidFill>
-                        <a:srgbClr val="FFFFFF"/>
-                      </a:solidFill>
-                    </a:tcPr>
-                  </a:tc>
-                  <a:tc>
-                    <a:txBody>
-                      <a:bodyPr wrap="square"/>
-                      <a:lstStyle/>
-                      <a:p>
-                        <a:pPr algn="ctr"/>
-                        <a:r>
-                          <a:rPr sz="1400" b="1">
-                            <a:solidFill>
-                              <a:srgbClr val="2E75D6"/>
-                            </a:solidFill>
-                            <a:latin typeface="Pretendard"/>
-                            <a:ea typeface="Pretendard"/>
-                            <a:cs typeface="Pretendard"/>
-                          </a:rPr>
-                          <a:t>◎</a:t>
-                        </a:r>
-                      </a:p>
-                    </a:txBody>
-                    <a:tcPr anchor="ctr" marL="63500" marR="63500" marT="38100" marB="38100">
-                      <a:solidFill>
-                        <a:srgbClr val="FFFFFF"/>
-                      </a:solidFill>
-                    </a:tcPr>
-                  </a:tc>
-                  <a:tc>
-                    <a:txBody>
-                      <a:bodyPr wrap="square"/>
-                      <a:lstStyle/>
-                      <a:p>
-                        <a:pPr algn="ctr"/>
-                        <a:r>
-                          <a:rPr sz="1200" b="1">
-                            <a:solidFill>
-                              <a:srgbClr val="2E75D6"/>
-                            </a:solidFill>
-                            <a:latin typeface="Pretendard"/>
-                            <a:ea typeface="Pretendard"/>
-                            <a:cs typeface="Pretendard"/>
-                          </a:rPr>
-                          <a:t>40%</a:t>
-                        </a:r>
-                      </a:p>
-                    </a:txBody>
-                    <a:tcPr anchor="ctr" marL="63500" marR="63500" marT="38100" marB="38100">
-                      <a:solidFill>
-                        <a:srgbClr val="FFFFFF"/>
-                      </a:solidFill>
-                    </a:tcPr>
-                  </a:tc>
-                </a:tr>
-                <a:tr h="566928">
-                  <a:tc>
-                    <a:txBody>
-                      <a:bodyPr wrap="square"/>
-                      <a:lstStyle/>
-                      <a:p>
-                        <a:pPr algn="l"/>
-                        <a:r>
-                          <a:rPr sz="1100" b="1">
-                            <a:solidFill>
-                              <a:srgbClr val="222222"/>
-                            </a:solidFill>
-                            <a:latin typeface="Pretendard"/>
-                            <a:ea typeface="Pretendard"/>
-                            <a:cs typeface="Pretendard"/>
-                          </a:rPr>
-                          <a:t>참여사 ㈜나</a:t>
-                        </a:r>
-                      </a:p>
-                    </a:txBody>
-                    <a:tcPr anchor="ctr" marL="63500" marR="63500" marT="38100" marB="38100">
-                      <a:solidFill>
-                        <a:srgbClr val="F2F2F2"/>
-                      </a:solidFill>
-                    </a:tcPr>
-                  </a:tc>
-                  <a:tc>
-                    <a:txBody>
-                      <a:bodyPr wrap="square"/>
-                      <a:lstStyle/>
-                      <a:p>
-                        <a:pPr algn="ctr"/>
-                        <a:r>
-                          <a:rPr sz="1400" b="1">
-                            <a:solidFill>
-                              <a:srgbClr val="1F9E8F"/>
-                            </a:solidFill>
-                            <a:latin typeface="Pretendard"/>
-                            <a:ea typeface="Pretendard"/>
-                            <a:cs typeface="Pretendard"/>
-                          </a:rPr>
-                          <a:t>●</a:t>
-                        </a:r>
-                      </a:p>
-                    </a:txBody>
-                    <a:tcPr anchor="ctr" marL="63500" marR="63500" marT="38100" marB="38100">
-                      <a:solidFill>
-                        <a:srgbClr val="F2F2F2"/>
-                      </a:solidFill>
-                    </a:tcPr>
-                  </a:tc>
-                  <a:tc>
-                    <a:txBody>
-                      <a:bodyPr wrap="square"/>
-                      <a:lstStyle/>
-                      <a:p>
-                        <a:pPr algn="ctr"/>
-                        <a:r>
-                          <a:rPr sz="1400" b="1">
-                            <a:solidFill>
-                              <a:srgbClr val="2E75D6"/>
-                            </a:solidFill>
-                            <a:latin typeface="Pretendard"/>
-                            <a:ea typeface="Pretendard"/>
-                            <a:cs typeface="Pretendard"/>
-                          </a:rPr>
-                          <a:t>◎</a:t>
-                        </a:r>
-                      </a:p>
-                    </a:txBody>
-                    <a:tcPr anchor="ctr" marL="63500" marR="63500" marT="38100" marB="38100">
-                      <a:solidFill>
-                        <a:srgbClr val="F2F2F2"/>
-                      </a:solidFill>
-                    </a:tcPr>
-                  </a:tc>
-                  <a:tc>
-                    <a:txBody>
-                      <a:bodyPr wrap="square"/>
-                      <a:lstStyle/>
-                      <a:p>
-                        <a:pPr algn="ctr"/>
-                        <a:r>
-                          <a:rPr sz="1400" b="0">
-                            <a:solidFill>
-                              <a:srgbClr val="595959"/>
-                            </a:solidFill>
-                            <a:latin typeface="Pretendard"/>
-                            <a:ea typeface="Pretendard"/>
-                            <a:cs typeface="Pretendard"/>
-                          </a:rPr>
-                          <a:t>–</a:t>
-                        </a:r>
-                      </a:p>
-                    </a:txBody>
-                    <a:tcPr anchor="ctr" marL="63500" marR="63500" marT="38100" marB="38100">
-                      <a:solidFill>
-                        <a:srgbClr val="F2F2F2"/>
-                      </a:solidFill>
-                    </a:tcPr>
-                  </a:tc>
-                  <a:tc>
-                    <a:txBody>
-                      <a:bodyPr wrap="square"/>
-                      <a:lstStyle/>
-                      <a:p>
-                        <a:pPr algn="ctr"/>
-                        <a:r>
-                          <a:rPr sz="1400" b="1">
-                            <a:solidFill>
-                              <a:srgbClr val="1F9E8F"/>
-                            </a:solidFill>
-                            <a:latin typeface="Pretendard"/>
-                            <a:ea typeface="Pretendard"/>
-                            <a:cs typeface="Pretendard"/>
-                          </a:rPr>
-                          <a:t>●</a:t>
-                        </a:r>
-                      </a:p>
-                    </a:txBody>
-                    <a:tcPr anchor="ctr" marL="63500" marR="63500" marT="38100" marB="38100">
-                      <a:solidFill>
-                        <a:srgbClr val="F2F2F2"/>
-                      </a:solidFill>
-                    </a:tcPr>
-                  </a:tc>
-                  <a:tc>
-                    <a:txBody>
-                      <a:bodyPr wrap="square"/>
-                      <a:lstStyle/>
-                      <a:p>
-                        <a:pPr algn="ctr"/>
-                        <a:r>
-                          <a:rPr sz="1200" b="1">
-                            <a:solidFill>
-                              <a:srgbClr val="2E75D6"/>
-                            </a:solidFill>
-                            <a:latin typeface="Pretendard"/>
-                            <a:ea typeface="Pretendard"/>
-                            <a:cs typeface="Pretendard"/>
-                          </a:rPr>
-                          <a:t>25%</a:t>
-                        </a:r>
-                      </a:p>
-                    </a:txBody>
-                    <a:tcPr anchor="ctr" marL="63500" marR="63500" marT="38100" marB="38100">
-                      <a:solidFill>
-                        <a:srgbClr val="F2F2F2"/>
-                      </a:solidFill>
-                    </a:tcPr>
-                  </a:tc>
-                </a:tr>
-                <a:tr h="566928">
-                  <a:tc>
-                    <a:txBody>
-                      <a:bodyPr wrap="square"/>
-                      <a:lstStyle/>
-                      <a:p>
-                        <a:pPr algn="l"/>
-                        <a:r>
-                          <a:rPr sz="1100" b="1">
-                            <a:solidFill>
-                              <a:srgbClr val="222222"/>
-                            </a:solidFill>
-                            <a:latin typeface="Pretendard"/>
-                            <a:ea typeface="Pretendard"/>
-                            <a:cs typeface="Pretendard"/>
-                          </a:rPr>
-                          <a:t>참여사 ㈜다</a:t>
-                        </a:r>
-                      </a:p>
-                    </a:txBody>
-                    <a:tcPr anchor="ctr" marL="63500" marR="63500" marT="38100" marB="38100">
-                      <a:solidFill>
-                        <a:srgbClr val="FFFFFF"/>
-                      </a:solidFill>
-                    </a:tcPr>
-                  </a:tc>
-                  <a:tc>
-                    <a:txBody>
-                      <a:bodyPr wrap="square"/>
-                      <a:lstStyle/>
-                      <a:p>
-                        <a:pPr algn="ctr"/>
-                        <a:r>
-                          <a:rPr sz="1400" b="0">
-                            <a:solidFill>
-                              <a:srgbClr val="595959"/>
-                            </a:solidFill>
-                            <a:latin typeface="Pretendard"/>
-                            <a:ea typeface="Pretendard"/>
-                            <a:cs typeface="Pretendard"/>
-                          </a:rPr>
-                          <a:t>–</a:t>
-                        </a:r>
-                      </a:p>
-                    </a:txBody>
-                    <a:tcPr anchor="ctr" marL="63500" marR="63500" marT="38100" marB="38100">
-                      <a:solidFill>
-                        <a:srgbClr val="FFFFFF"/>
-                      </a:solidFill>
-                    </a:tcPr>
-                  </a:tc>
-                  <a:tc>
-                    <a:txBody>
-                      <a:bodyPr wrap="square"/>
-                      <a:lstStyle/>
-                      <a:p>
-                        <a:pPr algn="ctr"/>
-                        <a:r>
-                          <a:rPr sz="1400" b="1">
-                            <a:solidFill>
-                              <a:srgbClr val="1F9E8F"/>
-                            </a:solidFill>
-                            <a:latin typeface="Pretendard"/>
-                            <a:ea typeface="Pretendard"/>
-                            <a:cs typeface="Pretendard"/>
-                          </a:rPr>
-                          <a:t>●</a:t>
-                        </a:r>
-                      </a:p>
-                    </a:txBody>
-                    <a:tcPr anchor="ctr" marL="63500" marR="63500" marT="38100" marB="38100">
-                      <a:solidFill>
-                        <a:srgbClr val="FFFFFF"/>
-                      </a:solidFill>
-                    </a:tcPr>
-                  </a:tc>
-                  <a:tc>
-                    <a:txBody>
-                      <a:bodyPr wrap="square"/>
-                      <a:lstStyle/>
-                      <a:p>
-                        <a:pPr algn="ctr"/>
-                        <a:r>
-                          <a:rPr sz="1400" b="1">
-                            <a:solidFill>
-                              <a:srgbClr val="2E75D6"/>
-                            </a:solidFill>
-                            <a:latin typeface="Pretendard"/>
-                            <a:ea typeface="Pretendard"/>
-                            <a:cs typeface="Pretendard"/>
-                          </a:rPr>
-                          <a:t>◎</a:t>
-                        </a:r>
-                      </a:p>
-                    </a:txBody>
-                    <a:tcPr anchor="ctr" marL="63500" marR="63500" marT="38100" marB="38100">
-                      <a:solidFill>
-                        <a:srgbClr val="FFFFFF"/>
-                      </a:solidFill>
-                    </a:tcPr>
-                  </a:tc>
-                  <a:tc>
-                    <a:txBody>
-                      <a:bodyPr wrap="square"/>
-                      <a:lstStyle/>
-                      <a:p>
-                        <a:pPr algn="ctr"/>
-                        <a:r>
-                          <a:rPr sz="1400" b="0">
-                            <a:solidFill>
-                              <a:srgbClr val="595959"/>
-                            </a:solidFill>
-                            <a:latin typeface="Pretendard"/>
-                            <a:ea typeface="Pretendard"/>
-                            <a:cs typeface="Pretendard"/>
-                          </a:rPr>
-                          <a:t>–</a:t>
-                        </a:r>
-                      </a:p>
-                    </a:txBody>
-                    <a:tcPr anchor="ctr" marL="63500" marR="63500" marT="38100" marB="38100">
-                      <a:solidFill>
-                        <a:srgbClr val="FFFFFF"/>
-                      </a:solidFill>
-                    </a:tcPr>
-                  </a:tc>
-                  <a:tc>
-                    <a:txBody>
-                      <a:bodyPr wrap="square"/>
-                      <a:lstStyle/>
-                      <a:p>
-                        <a:pPr algn="ctr"/>
-                        <a:r>
-                          <a:rPr sz="1200" b="1">
-                            <a:solidFill>
-                              <a:srgbClr val="2E75D6"/>
-                            </a:solidFill>
-                            <a:latin typeface="Pretendard"/>
-                            <a:ea typeface="Pretendard"/>
-                            <a:cs typeface="Pretendard"/>
-                          </a:rPr>
-                          <a:t>20%</a:t>
-                        </a:r>
-                      </a:p>
-                    </a:txBody>
-                    <a:tcPr anchor="ctr" marL="63500" marR="63500" marT="38100" marB="38100">
-                      <a:solidFill>
-                        <a:srgbClr val="FFFFFF"/>
-                      </a:solidFill>
-                    </a:tcPr>
-                  </a:tc>
-                </a:tr>
-                <a:tr h="566928">
-                  <a:tc>
-                    <a:txBody>
-                      <a:bodyPr wrap="square"/>
-                      <a:lstStyle/>
-                      <a:p>
-                        <a:pPr algn="l"/>
-                        <a:r>
-                          <a:rPr sz="1100" b="1">
-                            <a:solidFill>
-                              <a:srgbClr val="222222"/>
-                            </a:solidFill>
-                            <a:latin typeface="Pretendard"/>
-                            <a:ea typeface="Pretendard"/>
-                            <a:cs typeface="Pretendard"/>
-                          </a:rPr>
-                          <a:t>참여사 ㈜라</a:t>
-                        </a:r>
-                      </a:p>
-                    </a:txBody>
-                    <a:tcPr anchor="ctr" marL="63500" marR="63500" marT="38100" marB="38100">
-                      <a:solidFill>
-                        <a:srgbClr val="F2F2F2"/>
-                      </a:solidFill>
-                    </a:tcPr>
-                  </a:tc>
-                  <a:tc>
-                    <a:txBody>
-                      <a:bodyPr wrap="square"/>
-                      <a:lstStyle/>
-                      <a:p>
-                        <a:pPr algn="ctr"/>
-                        <a:r>
-                          <a:rPr sz="1400" b="0">
-                            <a:solidFill>
-                              <a:srgbClr val="595959"/>
-                            </a:solidFill>
-                            <a:latin typeface="Pretendard"/>
-                            <a:ea typeface="Pretendard"/>
-                            <a:cs typeface="Pretendard"/>
-                          </a:rPr>
-                          <a:t>–</a:t>
-                        </a:r>
-                      </a:p>
-                    </a:txBody>
-                    <a:tcPr anchor="ctr" marL="63500" marR="63500" marT="38100" marB="38100">
-                      <a:solidFill>
-                        <a:srgbClr val="F2F2F2"/>
-                      </a:solidFill>
-                    </a:tcPr>
-                  </a:tc>
-                  <a:tc>
-                    <a:txBody>
-                      <a:bodyPr wrap="square"/>
-                      <a:lstStyle/>
-                      <a:p>
-                        <a:pPr algn="ctr"/>
-                        <a:r>
-                          <a:rPr sz="1400" b="0">
-                            <a:solidFill>
-                              <a:srgbClr val="595959"/>
-                            </a:solidFill>
-                            <a:latin typeface="Pretendard"/>
-                            <a:ea typeface="Pretendard"/>
-                            <a:cs typeface="Pretendard"/>
-                          </a:rPr>
-                          <a:t>–</a:t>
-                        </a:r>
-                      </a:p>
-                    </a:txBody>
-                    <a:tcPr anchor="ctr" marL="63500" marR="63500" marT="38100" marB="38100">
-                      <a:solidFill>
-                        <a:srgbClr val="F2F2F2"/>
-                      </a:solidFill>
-                    </a:tcPr>
-                  </a:tc>
-                  <a:tc>
-                    <a:txBody>
-                      <a:bodyPr wrap="square"/>
-                      <a:lstStyle/>
-                      <a:p>
-                        <a:pPr algn="ctr"/>
-                        <a:r>
-                          <a:rPr sz="1400" b="1">
-                            <a:solidFill>
-                              <a:srgbClr val="1F9E8F"/>
-                            </a:solidFill>
-                            <a:latin typeface="Pretendard"/>
-                            <a:ea typeface="Pretendard"/>
-                            <a:cs typeface="Pretendard"/>
-                          </a:rPr>
-                          <a:t>●</a:t>
-                        </a:r>
-                      </a:p>
-                    </a:txBody>
-                    <a:tcPr anchor="ctr" marL="63500" marR="63500" marT="38100" marB="38100">
-                      <a:solidFill>
-                        <a:srgbClr val="F2F2F2"/>
-                      </a:solidFill>
-                    </a:tcPr>
-                  </a:tc>
-                  <a:tc>
-                    <a:txBody>
-                      <a:bodyPr wrap="square"/>
-                      <a:lstStyle/>
-                      <a:p>
-                        <a:pPr algn="ctr"/>
-                        <a:r>
-                          <a:rPr sz="1400" b="1">
-                            <a:solidFill>
-                              <a:srgbClr val="1F9E8F"/>
-                            </a:solidFill>
-                            <a:latin typeface="Pretendard"/>
-                            <a:ea typeface="Pretendard"/>
-                            <a:cs typeface="Pretendard"/>
-                          </a:rPr>
-                          <a:t>●</a:t>
-                        </a:r>
-                      </a:p>
-                    </a:txBody>
-                    <a:tcPr anchor="ctr" marL="63500" marR="63500" marT="38100" marB="38100">
-                      <a:solidFill>
-                        <a:srgbClr val="F2F2F2"/>
-                      </a:solidFill>
-                    </a:tcPr>
-                  </a:tc>
-                  <a:tc>
-                    <a:txBody>
-                      <a:bodyPr wrap="square"/>
-                      <a:lstStyle/>
-                      <a:p>
-                        <a:pPr algn="ctr"/>
-                        <a:r>
-                          <a:rPr sz="1200" b="1">
-                            <a:solidFill>
-                              <a:srgbClr val="2E75D6"/>
-                            </a:solidFill>
-                            <a:latin typeface="Pretendard"/>
-                            <a:ea typeface="Pretendard"/>
-                            <a:cs typeface="Pretendard"/>
-                          </a:rPr>
-                          <a:t>15%</a:t>
-                        </a:r>
-                      </a:p>
-                    </a:txBody>
-                    <a:tcPr anchor="ctr" marL="63500" marR="63500" marT="38100" marB="38100">
-                      <a:solidFill>
-                        <a:srgbClr val="F2F2F2"/>
-                      </a:solidFill>
-                    </a:tcPr>
-                  </a:tc>
-                </a:tr>
-                <a:tr h="502920">
-                  <a:tc>
-                    <a:txBody>
-                      <a:bodyPr wrap="square"/>
-                      <a:lstStyle/>
-                      <a:p>
-                        <a:pPr algn="ctr"/>
-                        <a:r>
-                          <a:rPr sz="1200" b="1">
-                            <a:solidFill>
-                              <a:srgbClr val="FFFFFF"/>
-                            </a:solidFill>
-                            <a:latin typeface="Pretendard"/>
-                            <a:ea typeface="Pretendard"/>
-                            <a:cs typeface="Pretendard"/>
-                          </a:rPr>
-                          <a:t>합계</a:t>
-                        </a:r>
-                      </a:p>
-                    </a:txBody>
-                    <a:tcPr anchor="ctr" marL="63500" marR="63500" marT="38100" marB="38100">
-                      <a:solidFill>
-                        <a:srgbClr val="2A4A7F"/>
-                      </a:solidFill>
-                    </a:tcPr>
-                  </a:tc>
-                  <a:tc gridSpan="4">
-                    <a:txBody>
-                      <a:bodyPr wrap="square"/>
-                      <a:lstStyle/>
-                      <a:p>
-                        <a:pPr algn="ctr"/>
-                        <a:r>
-                          <a:rPr sz="1050" b="1">
-                            <a:solidFill>
-                              <a:srgbClr val="595959"/>
-                            </a:solidFill>
-                            <a:latin typeface="Pretendard"/>
-                            <a:ea typeface="Pretendard"/>
-                            <a:cs typeface="Pretendard"/>
-                          </a:rPr>
-                          <a:t>◎ 주관 담당    ●  공동 참여    –  미참여</a:t>
-                        </a:r>
-                      </a:p>
-                    </a:txBody>
-                    <a:tcPr anchor="ctr" marL="63500" marR="63500" marT="38100" marB="38100">
-                      <a:solidFill>
-                        <a:srgbClr val="F7F9FC"/>
-                      </a:solidFill>
-                    </a:tcPr>
-                  </a:tc>
-                  <a:tc hMerge="1">
-                    <a:txBody>
-                      <a:bodyPr/>
-                      <a:lstStyle/>
-                      <a:p/>
-                    </a:txBody>
-                    <a:tcPr/>
-                  </a:tc>
-                  <a:tc hMerge="1">
-                    <a:txBody>
-                      <a:bodyPr/>
-                      <a:lstStyle/>
-                      <a:p/>
-                    </a:txBody>
-                    <a:tcPr/>
-                  </a:tc>
-                  <a:tc hMerge="1">
-                    <a:txBody>
-                      <a:bodyPr/>
-                      <a:lstStyle/>
-                      <a:p/>
-                    </a:txBody>
-                    <a:tcPr/>
-                  </a:tc>
-                  <a:tc>
-                    <a:txBody>
-                      <a:bodyPr wrap="square"/>
-                      <a:lstStyle/>
-                      <a:p>
-                        <a:pPr algn="ctr"/>
-                        <a:r>
-                          <a:rPr sz="1200" b="1">
-                            <a:solidFill>
-                              <a:srgbClr val="FFFFFF"/>
-                            </a:solidFill>
-                            <a:latin typeface="Pretendard"/>
-                            <a:ea typeface="Pretendard"/>
-                            <a:cs typeface="Pretendard"/>
-                          </a:rPr>
-                          <a:t>100%</a:t>
-                        </a:r>
-                      </a:p>
-                    </a:txBody>
-                    <a:tcPr anchor="ctr" marL="63500" marR="63500" marT="38100" marB="38100">
-                      <a:solidFill>
-                        <a:srgbClr val="2A4A7F"/>
-                      </a:solidFill>
-                    </a:tcPr>
-                  </a:tc>
-                </a:tr>
-              </a:tbl>
-            </a:graphicData>
-          </a:graphic>
-        </p:graphicFrame>
-      </p:grpSp>
+          <a:prstGeom prst="rect">
+            <a:avLst/>
+          </a:prstGeom>
+          <a:noFill/>
+        </p:spPr>
+        <p:txBody>
+          <a:bodyPr wrap="square" anchor="ctr" lIns="38100" rIns="38100" tIns="25400" bIns="25400">
+            <a:spAutoFit/>
+          </a:bodyPr>
+          <a:lstStyle/>
+          <a:p>
+            <a:pPr algn="l"/>
+            <a:r>
+              <a:rPr sz="900" b="1">
+                <a:solidFill>
+                  <a:srgbClr val="808080"/>
+                </a:solidFill>
+                <a:latin typeface="Pretendard"/>
+                <a:ea typeface="Pretendard"/>
+                <a:cs typeface="Pretendard"/>
+              </a:rPr>
+              <a:t>ORG-013 · 컨소시엄 역할분담표</a:t>
+            </a:r>
+          </a:p>
+        </p:txBody>
+      </p:sp>
+      <p:sp>
+        <p:nvSpPr>
+          <p:cNvPr id="3" name="TextBox 2"/>
+          <p:cNvSpPr txBox="1"/>
+          <p:nvPr/>
+        </p:nvSpPr>
+        <p:spPr>
+          <a:xfrm>
+            <a:off x="502920" y="457200"/>
+            <a:ext cx="11155680" cy="457200"/>
+          </a:xfrm>
+          <a:prstGeom prst="rect">
+            <a:avLst/>
+          </a:prstGeom>
+          <a:noFill/>
+        </p:spPr>
+        <p:txBody>
+          <a:bodyPr wrap="square" anchor="ctr" lIns="38100" rIns="38100" tIns="25400" bIns="25400">
+            <a:spAutoFit/>
+          </a:bodyPr>
+          <a:lstStyle/>
+          <a:p>
+            <a:pPr algn="l"/>
+            <a:r>
+              <a:rPr sz="1800" b="1">
+                <a:solidFill>
+                  <a:srgbClr val="1F3864"/>
+                </a:solidFill>
+                <a:latin typeface="Pretendard"/>
+                <a:ea typeface="Pretendard"/>
+                <a:cs typeface="Pretendard"/>
+              </a:rPr>
+              <a:t>컨소시엄 역할분담표</a:t>
+            </a:r>
+          </a:p>
+        </p:txBody>
+      </p:sp>
+      <p:sp>
+        <p:nvSpPr>
+          <p:cNvPr id="4" name="TextBox 3"/>
+          <p:cNvSpPr txBox="1"/>
+          <p:nvPr/>
+        </p:nvSpPr>
+        <p:spPr>
+          <a:xfrm>
+            <a:off x="502920" y="914400"/>
+            <a:ext cx="11155680" cy="292608"/>
+          </a:xfrm>
+          <a:prstGeom prst="rect">
+            <a:avLst/>
+          </a:prstGeom>
+          <a:noFill/>
+        </p:spPr>
+        <p:txBody>
+          <a:bodyPr wrap="square" anchor="ctr" lIns="38100" rIns="38100" tIns="25400" bIns="25400">
+            <a:spAutoFit/>
+          </a:bodyPr>
+          <a:lstStyle/>
+          <a:p>
+            <a:pPr algn="l"/>
+            <a:r>
+              <a:rPr sz="1100" b="0">
+                <a:solidFill>
+                  <a:srgbClr val="595959"/>
+                </a:solidFill>
+                <a:latin typeface="Pretendard"/>
+                <a:ea typeface="Pretendard"/>
+                <a:cs typeface="Pretendard"/>
+              </a:rPr>
+              <a:t>주관사·참여사 × 업무분장(WBS)별 담당·분담율</a:t>
+            </a:r>
+          </a:p>
+        </p:txBody>
+      </p:sp>
+      <p:graphicFrame>
+        <p:nvGraphicFramePr>
+          <p:cNvPr id="5" name="asset:ORG-013"/>
+          <p:cNvGraphicFramePr>
+            <a:graphicFrameLocks noGrp="1"/>
+          </p:cNvGraphicFramePr>
+          <p:nvPr/>
+        </p:nvGraphicFramePr>
+        <p:xfrm>
+          <a:off x="822960" y="1463040"/>
+          <a:ext cx="10424160" cy="3410712"/>
+        </p:xfrm>
+        <a:graphic>
+          <a:graphicData uri="http://schemas.openxmlformats.org/drawingml/2006/table">
+            <a:tbl>
+              <a:tblPr>
+                <a:tableStyleId>{5C22544A-7EE6-4342-B048-85BDC9FD1C3A}</a:tableStyleId>
+              </a:tblPr>
+              <a:tblGrid>
+                <a:gridCol w="1828800"/>
+                <a:gridCol w="1828800"/>
+                <a:gridCol w="1828800"/>
+                <a:gridCol w="1828800"/>
+                <a:gridCol w="1828800"/>
+                <a:gridCol w="1280160"/>
+              </a:tblGrid>
+              <a:tr h="640080">
+                <a:tc>
+                  <a:txBody>
+                    <a:bodyPr wrap="square"/>
+                    <a:lstStyle/>
+                    <a:p>
+                      <a:pPr algn="l"/>
+                      <a:r>
+                        <a:rPr sz="1200" b="1">
+                          <a:solidFill>
+                            <a:srgbClr val="FFFFFF"/>
+                          </a:solidFill>
+                          <a:latin typeface="Pretendard"/>
+                          <a:ea typeface="Pretendard"/>
+                          <a:cs typeface="Pretendard"/>
+                        </a:rPr>
+                        <a:t>구분</a:t>
+                      </a:r>
+                    </a:p>
+                  </a:txBody>
+                  <a:tcPr anchor="ctr" marL="63500" marR="63500" marT="38100" marB="38100">
+                    <a:solidFill>
+                      <a:srgbClr val="1F3864"/>
+                    </a:solidFill>
+                  </a:tcPr>
+                </a:tc>
+                <a:tc>
+                  <a:txBody>
+                    <a:bodyPr wrap="square"/>
+                    <a:lstStyle/>
+                    <a:p>
+                      <a:pPr algn="ctr"/>
+                      <a:r>
+                        <a:rPr sz="1100" b="1">
+                          <a:solidFill>
+                            <a:srgbClr val="FFFFFF"/>
+                          </a:solidFill>
+                          <a:latin typeface="Pretendard"/>
+                          <a:ea typeface="Pretendard"/>
+                          <a:cs typeface="Pretendard"/>
+                        </a:rPr>
+                        <a:t>WP1</a:t>
+                      </a:r>
+                    </a:p>
+                    <a:p>
+                      <a:pPr algn="ctr"/>
+                      <a:r>
+                        <a:rPr sz="1100" b="1">
+                          <a:solidFill>
+                            <a:srgbClr val="FFFFFF"/>
+                          </a:solidFill>
+                          <a:latin typeface="Pretendard"/>
+                          <a:ea typeface="Pretendard"/>
+                          <a:cs typeface="Pretendard"/>
+                        </a:rPr>
+                        <a:t>플랫폼 개발</a:t>
+                      </a:r>
+                    </a:p>
+                  </a:txBody>
+                  <a:tcPr anchor="ctr" marL="63500" marR="63500" marT="38100" marB="38100">
+                    <a:solidFill>
+                      <a:srgbClr val="1F3864"/>
+                    </a:solidFill>
+                  </a:tcPr>
+                </a:tc>
+                <a:tc>
+                  <a:txBody>
+                    <a:bodyPr wrap="square"/>
+                    <a:lstStyle/>
+                    <a:p>
+                      <a:pPr algn="ctr"/>
+                      <a:r>
+                        <a:rPr sz="1100" b="1">
+                          <a:solidFill>
+                            <a:srgbClr val="FFFFFF"/>
+                          </a:solidFill>
+                          <a:latin typeface="Pretendard"/>
+                          <a:ea typeface="Pretendard"/>
+                          <a:cs typeface="Pretendard"/>
+                        </a:rPr>
+                        <a:t>WP2</a:t>
+                      </a:r>
+                    </a:p>
+                    <a:p>
+                      <a:pPr algn="ctr"/>
+                      <a:r>
+                        <a:rPr sz="1100" b="1">
+                          <a:solidFill>
+                            <a:srgbClr val="FFFFFF"/>
+                          </a:solidFill>
+                          <a:latin typeface="Pretendard"/>
+                          <a:ea typeface="Pretendard"/>
+                          <a:cs typeface="Pretendard"/>
+                        </a:rPr>
+                        <a:t>현지화</a:t>
+                      </a:r>
+                    </a:p>
+                  </a:txBody>
+                  <a:tcPr anchor="ctr" marL="63500" marR="63500" marT="38100" marB="38100">
+                    <a:solidFill>
+                      <a:srgbClr val="1F3864"/>
+                    </a:solidFill>
+                  </a:tcPr>
+                </a:tc>
+                <a:tc>
+                  <a:txBody>
+                    <a:bodyPr wrap="square"/>
+                    <a:lstStyle/>
+                    <a:p>
+                      <a:pPr algn="ctr"/>
+                      <a:r>
+                        <a:rPr sz="1100" b="1">
+                          <a:solidFill>
+                            <a:srgbClr val="FFFFFF"/>
+                          </a:solidFill>
+                          <a:latin typeface="Pretendard"/>
+                          <a:ea typeface="Pretendard"/>
+                          <a:cs typeface="Pretendard"/>
+                        </a:rPr>
+                        <a:t>WP3</a:t>
+                      </a:r>
+                    </a:p>
+                    <a:p>
+                      <a:pPr algn="ctr"/>
+                      <a:r>
+                        <a:rPr sz="1100" b="1">
+                          <a:solidFill>
+                            <a:srgbClr val="FFFFFF"/>
+                          </a:solidFill>
+                          <a:latin typeface="Pretendard"/>
+                          <a:ea typeface="Pretendard"/>
+                          <a:cs typeface="Pretendard"/>
+                        </a:rPr>
+                        <a:t>마케팅·배급</a:t>
+                      </a:r>
+                    </a:p>
+                  </a:txBody>
+                  <a:tcPr anchor="ctr" marL="63500" marR="63500" marT="38100" marB="38100">
+                    <a:solidFill>
+                      <a:srgbClr val="1F3864"/>
+                    </a:solidFill>
+                  </a:tcPr>
+                </a:tc>
+                <a:tc>
+                  <a:txBody>
+                    <a:bodyPr wrap="square"/>
+                    <a:lstStyle/>
+                    <a:p>
+                      <a:pPr algn="ctr"/>
+                      <a:r>
+                        <a:rPr sz="1100" b="1">
+                          <a:solidFill>
+                            <a:srgbClr val="FFFFFF"/>
+                          </a:solidFill>
+                          <a:latin typeface="Pretendard"/>
+                          <a:ea typeface="Pretendard"/>
+                          <a:cs typeface="Pretendard"/>
+                        </a:rPr>
+                        <a:t>WP4</a:t>
+                      </a:r>
+                    </a:p>
+                    <a:p>
+                      <a:pPr algn="ctr"/>
+                      <a:r>
+                        <a:rPr sz="1100" b="1">
+                          <a:solidFill>
+                            <a:srgbClr val="FFFFFF"/>
+                          </a:solidFill>
+                          <a:latin typeface="Pretendard"/>
+                          <a:ea typeface="Pretendard"/>
+                          <a:cs typeface="Pretendard"/>
+                        </a:rPr>
+                        <a:t>운영·유지보수</a:t>
+                      </a:r>
+                    </a:p>
+                  </a:txBody>
+                  <a:tcPr anchor="ctr" marL="63500" marR="63500" marT="38100" marB="38100">
+                    <a:solidFill>
+                      <a:srgbClr val="1F3864"/>
+                    </a:solidFill>
+                  </a:tcPr>
+                </a:tc>
+                <a:tc>
+                  <a:txBody>
+                    <a:bodyPr wrap="square"/>
+                    <a:lstStyle/>
+                    <a:p>
+                      <a:pPr algn="ctr"/>
+                      <a:r>
+                        <a:rPr sz="1200" b="1">
+                          <a:solidFill>
+                            <a:srgbClr val="FFFFFF"/>
+                          </a:solidFill>
+                          <a:latin typeface="Pretendard"/>
+                          <a:ea typeface="Pretendard"/>
+                          <a:cs typeface="Pretendard"/>
+                        </a:rPr>
+                        <a:t>분담율</a:t>
+                      </a:r>
+                    </a:p>
+                  </a:txBody>
+                  <a:tcPr anchor="ctr" marL="63500" marR="63500" marT="38100" marB="38100">
+                    <a:solidFill>
+                      <a:srgbClr val="1F3864"/>
+                    </a:solidFill>
+                  </a:tcPr>
+                </a:tc>
+              </a:tr>
+              <a:tr h="566928">
+                <a:tc>
+                  <a:txBody>
+                    <a:bodyPr wrap="square"/>
+                    <a:lstStyle/>
+                    <a:p>
+                      <a:pPr algn="l"/>
+                      <a:r>
+                        <a:rPr sz="1100" b="1">
+                          <a:solidFill>
+                            <a:srgbClr val="1F3864"/>
+                          </a:solidFill>
+                          <a:latin typeface="Pretendard"/>
+                          <a:ea typeface="Pretendard"/>
+                          <a:cs typeface="Pretendard"/>
+                        </a:rPr>
+                        <a:t>주관사 ㈜가</a:t>
+                      </a:r>
+                    </a:p>
+                  </a:txBody>
+                  <a:tcPr anchor="ctr" marL="63500" marR="63500" marT="38100" marB="38100">
+                    <a:solidFill>
+                      <a:srgbClr val="FFFFFF"/>
+                    </a:solidFill>
+                  </a:tcPr>
+                </a:tc>
+                <a:tc>
+                  <a:txBody>
+                    <a:bodyPr wrap="square"/>
+                    <a:lstStyle/>
+                    <a:p>
+                      <a:pPr algn="ctr"/>
+                      <a:r>
+                        <a:rPr sz="1400" b="1">
+                          <a:solidFill>
+                            <a:srgbClr val="2E75D6"/>
+                          </a:solidFill>
+                          <a:latin typeface="Pretendard"/>
+                          <a:ea typeface="Pretendard"/>
+                          <a:cs typeface="Pretendard"/>
+                        </a:rPr>
+                        <a:t>◎</a:t>
+                      </a:r>
+                    </a:p>
+                  </a:txBody>
+                  <a:tcPr anchor="ctr" marL="63500" marR="63500" marT="38100" marB="38100">
+                    <a:solidFill>
+                      <a:srgbClr val="FFFFFF"/>
+                    </a:solidFill>
+                  </a:tcPr>
+                </a:tc>
+                <a:tc>
+                  <a:txBody>
+                    <a:bodyPr wrap="square"/>
+                    <a:lstStyle/>
+                    <a:p>
+                      <a:pPr algn="ctr"/>
+                      <a:r>
+                        <a:rPr sz="1400" b="1">
+                          <a:solidFill>
+                            <a:srgbClr val="1F9E8F"/>
+                          </a:solidFill>
+                          <a:latin typeface="Pretendard"/>
+                          <a:ea typeface="Pretendard"/>
+                          <a:cs typeface="Pretendard"/>
+                        </a:rPr>
+                        <a:t>●</a:t>
+                      </a:r>
+                    </a:p>
+                  </a:txBody>
+                  <a:tcPr anchor="ctr" marL="63500" marR="63500" marT="38100" marB="38100">
+                    <a:solidFill>
+                      <a:srgbClr val="FFFFFF"/>
+                    </a:solidFill>
+                  </a:tcPr>
+                </a:tc>
+                <a:tc>
+                  <a:txBody>
+                    <a:bodyPr wrap="square"/>
+                    <a:lstStyle/>
+                    <a:p>
+                      <a:pPr algn="ctr"/>
+                      <a:r>
+                        <a:rPr sz="1400" b="0">
+                          <a:solidFill>
+                            <a:srgbClr val="595959"/>
+                          </a:solidFill>
+                          <a:latin typeface="Pretendard"/>
+                          <a:ea typeface="Pretendard"/>
+                          <a:cs typeface="Pretendard"/>
+                        </a:rPr>
+                        <a:t>–</a:t>
+                      </a:r>
+                    </a:p>
+                  </a:txBody>
+                  <a:tcPr anchor="ctr" marL="63500" marR="63500" marT="38100" marB="38100">
+                    <a:solidFill>
+                      <a:srgbClr val="FFFFFF"/>
+                    </a:solidFill>
+                  </a:tcPr>
+                </a:tc>
+                <a:tc>
+                  <a:txBody>
+                    <a:bodyPr wrap="square"/>
+                    <a:lstStyle/>
+                    <a:p>
+                      <a:pPr algn="ctr"/>
+                      <a:r>
+                        <a:rPr sz="1400" b="1">
+                          <a:solidFill>
+                            <a:srgbClr val="2E75D6"/>
+                          </a:solidFill>
+                          <a:latin typeface="Pretendard"/>
+                          <a:ea typeface="Pretendard"/>
+                          <a:cs typeface="Pretendard"/>
+                        </a:rPr>
+                        <a:t>◎</a:t>
+                      </a:r>
+                    </a:p>
+                  </a:txBody>
+                  <a:tcPr anchor="ctr" marL="63500" marR="63500" marT="38100" marB="38100">
+                    <a:solidFill>
+                      <a:srgbClr val="FFFFFF"/>
+                    </a:solidFill>
+                  </a:tcPr>
+                </a:tc>
+                <a:tc>
+                  <a:txBody>
+                    <a:bodyPr wrap="square"/>
+                    <a:lstStyle/>
+                    <a:p>
+                      <a:pPr algn="ctr"/>
+                      <a:r>
+                        <a:rPr sz="1200" b="1">
+                          <a:solidFill>
+                            <a:srgbClr val="2E75D6"/>
+                          </a:solidFill>
+                          <a:latin typeface="Pretendard"/>
+                          <a:ea typeface="Pretendard"/>
+                          <a:cs typeface="Pretendard"/>
+                        </a:rPr>
+                        <a:t>40%</a:t>
+                      </a:r>
+                    </a:p>
+                  </a:txBody>
+                  <a:tcPr anchor="ctr" marL="63500" marR="63500" marT="38100" marB="38100">
+                    <a:solidFill>
+                      <a:srgbClr val="FFFFFF"/>
+                    </a:solidFill>
+                  </a:tcPr>
+                </a:tc>
+              </a:tr>
+              <a:tr h="566928">
+                <a:tc>
+                  <a:txBody>
+                    <a:bodyPr wrap="square"/>
+                    <a:lstStyle/>
+                    <a:p>
+                      <a:pPr algn="l"/>
+                      <a:r>
+                        <a:rPr sz="1100" b="1">
+                          <a:solidFill>
+                            <a:srgbClr val="222222"/>
+                          </a:solidFill>
+                          <a:latin typeface="Pretendard"/>
+                          <a:ea typeface="Pretendard"/>
+                          <a:cs typeface="Pretendard"/>
+                        </a:rPr>
+                        <a:t>참여사 ㈜나</a:t>
+                      </a:r>
+                    </a:p>
+                  </a:txBody>
+                  <a:tcPr anchor="ctr" marL="63500" marR="63500" marT="38100" marB="38100">
+                    <a:solidFill>
+                      <a:srgbClr val="F2F2F2"/>
+                    </a:solidFill>
+                  </a:tcPr>
+                </a:tc>
+                <a:tc>
+                  <a:txBody>
+                    <a:bodyPr wrap="square"/>
+                    <a:lstStyle/>
+                    <a:p>
+                      <a:pPr algn="ctr"/>
+                      <a:r>
+                        <a:rPr sz="1400" b="1">
+                          <a:solidFill>
+                            <a:srgbClr val="1F9E8F"/>
+                          </a:solidFill>
+                          <a:latin typeface="Pretendard"/>
+                          <a:ea typeface="Pretendard"/>
+                          <a:cs typeface="Pretendard"/>
+                        </a:rPr>
+                        <a:t>●</a:t>
+                      </a:r>
+                    </a:p>
+                  </a:txBody>
+                  <a:tcPr anchor="ctr" marL="63500" marR="63500" marT="38100" marB="38100">
+                    <a:solidFill>
+                      <a:srgbClr val="F2F2F2"/>
+                    </a:solidFill>
+                  </a:tcPr>
+                </a:tc>
+                <a:tc>
+                  <a:txBody>
+                    <a:bodyPr wrap="square"/>
+                    <a:lstStyle/>
+                    <a:p>
+                      <a:pPr algn="ctr"/>
+                      <a:r>
+                        <a:rPr sz="1400" b="1">
+                          <a:solidFill>
+                            <a:srgbClr val="2E75D6"/>
+                          </a:solidFill>
+                          <a:latin typeface="Pretendard"/>
+                          <a:ea typeface="Pretendard"/>
+                          <a:cs typeface="Pretendard"/>
+                        </a:rPr>
+                        <a:t>◎</a:t>
+                      </a:r>
+                    </a:p>
+                  </a:txBody>
+                  <a:tcPr anchor="ctr" marL="63500" marR="63500" marT="38100" marB="38100">
+                    <a:solidFill>
+                      <a:srgbClr val="F2F2F2"/>
+                    </a:solidFill>
+                  </a:tcPr>
+                </a:tc>
+                <a:tc>
+                  <a:txBody>
+                    <a:bodyPr wrap="square"/>
+                    <a:lstStyle/>
+                    <a:p>
+                      <a:pPr algn="ctr"/>
+                      <a:r>
+                        <a:rPr sz="1400" b="0">
+                          <a:solidFill>
+                            <a:srgbClr val="595959"/>
+                          </a:solidFill>
+                          <a:latin typeface="Pretendard"/>
+                          <a:ea typeface="Pretendard"/>
+                          <a:cs typeface="Pretendard"/>
+                        </a:rPr>
+                        <a:t>–</a:t>
+                      </a:r>
+                    </a:p>
+                  </a:txBody>
+                  <a:tcPr anchor="ctr" marL="63500" marR="63500" marT="38100" marB="38100">
+                    <a:solidFill>
+                      <a:srgbClr val="F2F2F2"/>
+                    </a:solidFill>
+                  </a:tcPr>
+                </a:tc>
+                <a:tc>
+                  <a:txBody>
+                    <a:bodyPr wrap="square"/>
+                    <a:lstStyle/>
+                    <a:p>
+                      <a:pPr algn="ctr"/>
+                      <a:r>
+                        <a:rPr sz="1400" b="1">
+                          <a:solidFill>
+                            <a:srgbClr val="1F9E8F"/>
+                          </a:solidFill>
+                          <a:latin typeface="Pretendard"/>
+                          <a:ea typeface="Pretendard"/>
+                          <a:cs typeface="Pretendard"/>
+                        </a:rPr>
+                        <a:t>●</a:t>
+                      </a:r>
+                    </a:p>
+                  </a:txBody>
+                  <a:tcPr anchor="ctr" marL="63500" marR="63500" marT="38100" marB="38100">
+                    <a:solidFill>
+                      <a:srgbClr val="F2F2F2"/>
+                    </a:solidFill>
+                  </a:tcPr>
+                </a:tc>
+                <a:tc>
+                  <a:txBody>
+                    <a:bodyPr wrap="square"/>
+                    <a:lstStyle/>
+                    <a:p>
+                      <a:pPr algn="ctr"/>
+                      <a:r>
+                        <a:rPr sz="1200" b="1">
+                          <a:solidFill>
+                            <a:srgbClr val="2E75D6"/>
+                          </a:solidFill>
+                          <a:latin typeface="Pretendard"/>
+                          <a:ea typeface="Pretendard"/>
+                          <a:cs typeface="Pretendard"/>
+                        </a:rPr>
+                        <a:t>25%</a:t>
+                      </a:r>
+                    </a:p>
+                  </a:txBody>
+                  <a:tcPr anchor="ctr" marL="63500" marR="63500" marT="38100" marB="38100">
+                    <a:solidFill>
+                      <a:srgbClr val="F2F2F2"/>
+                    </a:solidFill>
+                  </a:tcPr>
+                </a:tc>
+              </a:tr>
+              <a:tr h="566928">
+                <a:tc>
+                  <a:txBody>
+                    <a:bodyPr wrap="square"/>
+                    <a:lstStyle/>
+                    <a:p>
+                      <a:pPr algn="l"/>
+                      <a:r>
+                        <a:rPr sz="1100" b="1">
+                          <a:solidFill>
+                            <a:srgbClr val="222222"/>
+                          </a:solidFill>
+                          <a:latin typeface="Pretendard"/>
+                          <a:ea typeface="Pretendard"/>
+                          <a:cs typeface="Pretendard"/>
+                        </a:rPr>
+                        <a:t>참여사 ㈜다</a:t>
+                      </a:r>
+                    </a:p>
+                  </a:txBody>
+                  <a:tcPr anchor="ctr" marL="63500" marR="63500" marT="38100" marB="38100">
+                    <a:solidFill>
+                      <a:srgbClr val="FFFFFF"/>
+                    </a:solidFill>
+                  </a:tcPr>
+                </a:tc>
+                <a:tc>
+                  <a:txBody>
+                    <a:bodyPr wrap="square"/>
+                    <a:lstStyle/>
+                    <a:p>
+                      <a:pPr algn="ctr"/>
+                      <a:r>
+                        <a:rPr sz="1400" b="0">
+                          <a:solidFill>
+                            <a:srgbClr val="595959"/>
+                          </a:solidFill>
+                          <a:latin typeface="Pretendard"/>
+                          <a:ea typeface="Pretendard"/>
+                          <a:cs typeface="Pretendard"/>
+                        </a:rPr>
+                        <a:t>–</a:t>
+                      </a:r>
+                    </a:p>
+                  </a:txBody>
+                  <a:tcPr anchor="ctr" marL="63500" marR="63500" marT="38100" marB="38100">
+                    <a:solidFill>
+                      <a:srgbClr val="FFFFFF"/>
+                    </a:solidFill>
+                  </a:tcPr>
+                </a:tc>
+                <a:tc>
+                  <a:txBody>
+                    <a:bodyPr wrap="square"/>
+                    <a:lstStyle/>
+                    <a:p>
+                      <a:pPr algn="ctr"/>
+                      <a:r>
+                        <a:rPr sz="1400" b="1">
+                          <a:solidFill>
+                            <a:srgbClr val="1F9E8F"/>
+                          </a:solidFill>
+                          <a:latin typeface="Pretendard"/>
+                          <a:ea typeface="Pretendard"/>
+                          <a:cs typeface="Pretendard"/>
+                        </a:rPr>
+                        <a:t>●</a:t>
+                      </a:r>
+                    </a:p>
+                  </a:txBody>
+                  <a:tcPr anchor="ctr" marL="63500" marR="63500" marT="38100" marB="38100">
+                    <a:solidFill>
+                      <a:srgbClr val="FFFFFF"/>
+                    </a:solidFill>
+                  </a:tcPr>
+                </a:tc>
+                <a:tc>
+                  <a:txBody>
+                    <a:bodyPr wrap="square"/>
+                    <a:lstStyle/>
+                    <a:p>
+                      <a:pPr algn="ctr"/>
+                      <a:r>
+                        <a:rPr sz="1400" b="1">
+                          <a:solidFill>
+                            <a:srgbClr val="2E75D6"/>
+                          </a:solidFill>
+                          <a:latin typeface="Pretendard"/>
+                          <a:ea typeface="Pretendard"/>
+                          <a:cs typeface="Pretendard"/>
+                        </a:rPr>
+                        <a:t>◎</a:t>
+                      </a:r>
+                    </a:p>
+                  </a:txBody>
+                  <a:tcPr anchor="ctr" marL="63500" marR="63500" marT="38100" marB="38100">
+                    <a:solidFill>
+                      <a:srgbClr val="FFFFFF"/>
+                    </a:solidFill>
+                  </a:tcPr>
+                </a:tc>
+                <a:tc>
+                  <a:txBody>
+                    <a:bodyPr wrap="square"/>
+                    <a:lstStyle/>
+                    <a:p>
+                      <a:pPr algn="ctr"/>
+                      <a:r>
+                        <a:rPr sz="1400" b="0">
+                          <a:solidFill>
+                            <a:srgbClr val="595959"/>
+                          </a:solidFill>
+                          <a:latin typeface="Pretendard"/>
+                          <a:ea typeface="Pretendard"/>
+                          <a:cs typeface="Pretendard"/>
+                        </a:rPr>
+                        <a:t>–</a:t>
+                      </a:r>
+                    </a:p>
+                  </a:txBody>
+                  <a:tcPr anchor="ctr" marL="63500" marR="63500" marT="38100" marB="38100">
+                    <a:solidFill>
+                      <a:srgbClr val="FFFFFF"/>
+                    </a:solidFill>
+                  </a:tcPr>
+                </a:tc>
+                <a:tc>
+                  <a:txBody>
+                    <a:bodyPr wrap="square"/>
+                    <a:lstStyle/>
+                    <a:p>
+                      <a:pPr algn="ctr"/>
+                      <a:r>
+                        <a:rPr sz="1200" b="1">
+                          <a:solidFill>
+                            <a:srgbClr val="2E75D6"/>
+                          </a:solidFill>
+                          <a:latin typeface="Pretendard"/>
+                          <a:ea typeface="Pretendard"/>
+                          <a:cs typeface="Pretendard"/>
+                        </a:rPr>
+                        <a:t>20%</a:t>
+                      </a:r>
+                    </a:p>
+                  </a:txBody>
+                  <a:tcPr anchor="ctr" marL="63500" marR="63500" marT="38100" marB="38100">
+                    <a:solidFill>
+                      <a:srgbClr val="FFFFFF"/>
+                    </a:solidFill>
+                  </a:tcPr>
+                </a:tc>
+              </a:tr>
+              <a:tr h="566928">
+                <a:tc>
+                  <a:txBody>
+                    <a:bodyPr wrap="square"/>
+                    <a:lstStyle/>
+                    <a:p>
+                      <a:pPr algn="l"/>
+                      <a:r>
+                        <a:rPr sz="1100" b="1">
+                          <a:solidFill>
+                            <a:srgbClr val="222222"/>
+                          </a:solidFill>
+                          <a:latin typeface="Pretendard"/>
+                          <a:ea typeface="Pretendard"/>
+                          <a:cs typeface="Pretendard"/>
+                        </a:rPr>
+                        <a:t>참여사 ㈜라</a:t>
+                      </a:r>
+                    </a:p>
+                  </a:txBody>
+                  <a:tcPr anchor="ctr" marL="63500" marR="63500" marT="38100" marB="38100">
+                    <a:solidFill>
+                      <a:srgbClr val="F2F2F2"/>
+                    </a:solidFill>
+                  </a:tcPr>
+                </a:tc>
+                <a:tc>
+                  <a:txBody>
+                    <a:bodyPr wrap="square"/>
+                    <a:lstStyle/>
+                    <a:p>
+                      <a:pPr algn="ctr"/>
+                      <a:r>
+                        <a:rPr sz="1400" b="0">
+                          <a:solidFill>
+                            <a:srgbClr val="595959"/>
+                          </a:solidFill>
+                          <a:latin typeface="Pretendard"/>
+                          <a:ea typeface="Pretendard"/>
+                          <a:cs typeface="Pretendard"/>
+                        </a:rPr>
+                        <a:t>–</a:t>
+                      </a:r>
+                    </a:p>
+                  </a:txBody>
+                  <a:tcPr anchor="ctr" marL="63500" marR="63500" marT="38100" marB="38100">
+                    <a:solidFill>
+                      <a:srgbClr val="F2F2F2"/>
+                    </a:solidFill>
+                  </a:tcPr>
+                </a:tc>
+                <a:tc>
+                  <a:txBody>
+                    <a:bodyPr wrap="square"/>
+                    <a:lstStyle/>
+                    <a:p>
+                      <a:pPr algn="ctr"/>
+                      <a:r>
+                        <a:rPr sz="1400" b="0">
+                          <a:solidFill>
+                            <a:srgbClr val="595959"/>
+                          </a:solidFill>
+                          <a:latin typeface="Pretendard"/>
+                          <a:ea typeface="Pretendard"/>
+                          <a:cs typeface="Pretendard"/>
+                        </a:rPr>
+                        <a:t>–</a:t>
+                      </a:r>
+                    </a:p>
+                  </a:txBody>
+                  <a:tcPr anchor="ctr" marL="63500" marR="63500" marT="38100" marB="38100">
+                    <a:solidFill>
+                      <a:srgbClr val="F2F2F2"/>
+                    </a:solidFill>
+                  </a:tcPr>
+                </a:tc>
+                <a:tc>
+                  <a:txBody>
+                    <a:bodyPr wrap="square"/>
+                    <a:lstStyle/>
+                    <a:p>
+                      <a:pPr algn="ctr"/>
+                      <a:r>
+                        <a:rPr sz="1400" b="1">
+                          <a:solidFill>
+                            <a:srgbClr val="1F9E8F"/>
+                          </a:solidFill>
+                          <a:latin typeface="Pretendard"/>
+                          <a:ea typeface="Pretendard"/>
+                          <a:cs typeface="Pretendard"/>
+                        </a:rPr>
+                        <a:t>●</a:t>
+                      </a:r>
+                    </a:p>
+                  </a:txBody>
+                  <a:tcPr anchor="ctr" marL="63500" marR="63500" marT="38100" marB="38100">
+                    <a:solidFill>
+                      <a:srgbClr val="F2F2F2"/>
+                    </a:solidFill>
+                  </a:tcPr>
+                </a:tc>
+                <a:tc>
+                  <a:txBody>
+                    <a:bodyPr wrap="square"/>
+                    <a:lstStyle/>
+                    <a:p>
+                      <a:pPr algn="ctr"/>
+                      <a:r>
+                        <a:rPr sz="1400" b="1">
+                          <a:solidFill>
+                            <a:srgbClr val="1F9E8F"/>
+                          </a:solidFill>
+                          <a:latin typeface="Pretendard"/>
+                          <a:ea typeface="Pretendard"/>
+                          <a:cs typeface="Pretendard"/>
+                        </a:rPr>
+                        <a:t>●</a:t>
+                      </a:r>
+                    </a:p>
+                  </a:txBody>
+                  <a:tcPr anchor="ctr" marL="63500" marR="63500" marT="38100" marB="38100">
+                    <a:solidFill>
+                      <a:srgbClr val="F2F2F2"/>
+                    </a:solidFill>
+                  </a:tcPr>
+                </a:tc>
+                <a:tc>
+                  <a:txBody>
+                    <a:bodyPr wrap="square"/>
+                    <a:lstStyle/>
+                    <a:p>
+                      <a:pPr algn="ctr"/>
+                      <a:r>
+                        <a:rPr sz="1200" b="1">
+                          <a:solidFill>
+                            <a:srgbClr val="2E75D6"/>
+                          </a:solidFill>
+                          <a:latin typeface="Pretendard"/>
+                          <a:ea typeface="Pretendard"/>
+                          <a:cs typeface="Pretendard"/>
+                        </a:rPr>
+                        <a:t>15%</a:t>
+                      </a:r>
+                    </a:p>
+                  </a:txBody>
+                  <a:tcPr anchor="ctr" marL="63500" marR="63500" marT="38100" marB="38100">
+                    <a:solidFill>
+                      <a:srgbClr val="F2F2F2"/>
+                    </a:solidFill>
+                  </a:tcPr>
+                </a:tc>
+              </a:tr>
+              <a:tr h="502920">
+                <a:tc>
+                  <a:txBody>
+                    <a:bodyPr wrap="square"/>
+                    <a:lstStyle/>
+                    <a:p>
+                      <a:pPr algn="ctr"/>
+                      <a:r>
+                        <a:rPr sz="1200" b="1">
+                          <a:solidFill>
+                            <a:srgbClr val="FFFFFF"/>
+                          </a:solidFill>
+                          <a:latin typeface="Pretendard"/>
+                          <a:ea typeface="Pretendard"/>
+                          <a:cs typeface="Pretendard"/>
+                        </a:rPr>
+                        <a:t>합계</a:t>
+                      </a:r>
+                    </a:p>
+                  </a:txBody>
+                  <a:tcPr anchor="ctr" marL="63500" marR="63500" marT="38100" marB="38100">
+                    <a:solidFill>
+                      <a:srgbClr val="2A4A7F"/>
+                    </a:solidFill>
+                  </a:tcPr>
+                </a:tc>
+                <a:tc gridSpan="4">
+                  <a:txBody>
+                    <a:bodyPr wrap="square"/>
+                    <a:lstStyle/>
+                    <a:p>
+                      <a:pPr algn="ctr"/>
+                      <a:r>
+                        <a:rPr sz="1050" b="1">
+                          <a:solidFill>
+                            <a:srgbClr val="595959"/>
+                          </a:solidFill>
+                          <a:latin typeface="Pretendard"/>
+                          <a:ea typeface="Pretendard"/>
+                          <a:cs typeface="Pretendard"/>
+                        </a:rPr>
+                        <a:t>◎ 주관 담당    ●  공동 참여    –  미참여</a:t>
+                      </a:r>
+                    </a:p>
+                  </a:txBody>
+                  <a:tcPr anchor="ctr" marL="63500" marR="63500" marT="38100" marB="38100">
+                    <a:solidFill>
+                      <a:srgbClr val="F7F9FC"/>
+                    </a:solidFill>
+                  </a:tcPr>
+                </a:tc>
+                <a:tc hMerge="1">
+                  <a:txBody>
+                    <a:bodyPr/>
+                    <a:lstStyle/>
+                    <a:p/>
+                  </a:txBody>
+                  <a:tcPr/>
+                </a:tc>
+                <a:tc hMerge="1">
+                  <a:txBody>
+                    <a:bodyPr/>
+                    <a:lstStyle/>
+                    <a:p/>
+                  </a:txBody>
+                  <a:tcPr/>
+                </a:tc>
+                <a:tc hMerge="1">
+                  <a:txBody>
+                    <a:bodyPr/>
+                    <a:lstStyle/>
+                    <a:p/>
+                  </a:txBody>
+                  <a:tcPr/>
+                </a:tc>
+                <a:tc>
+                  <a:txBody>
+                    <a:bodyPr wrap="square"/>
+                    <a:lstStyle/>
+                    <a:p>
+                      <a:pPr algn="ctr"/>
+                      <a:r>
+                        <a:rPr sz="1200" b="1">
+                          <a:solidFill>
+                            <a:srgbClr val="FFFFFF"/>
+                          </a:solidFill>
+                          <a:latin typeface="Pretendard"/>
+                          <a:ea typeface="Pretendard"/>
+                          <a:cs typeface="Pretendard"/>
+                        </a:rPr>
+                        <a:t>100%</a:t>
+                      </a:r>
+                    </a:p>
+                  </a:txBody>
+                  <a:tcPr anchor="ctr" marL="63500" marR="63500" marT="38100" marB="38100">
+                    <a:solidFill>
+                      <a:srgbClr val="2A4A7F"/>
+                    </a:solidFill>
+                  </a:tcPr>
+                </a:tc>
+              </a:tr>
+            </a:tbl>
+          </a:graphicData>
+        </a:graphic>
+      </p:graphicFrame>
     </p:spTree>
   </p:cSld>
   <p:clrMapOvr>
